--- a/report/presentation/Nepal_Aid_Transparency_Briefing.pptx
+++ b/report/presentation/Nepal_Aid_Transparency_Briefing.pptx
@@ -14,9 +14,11 @@
     <p:sldId id="262" r:id="rId8"/>
     <p:sldId id="263" r:id="rId9"/>
     <p:sldId id="264" r:id="rId10"/>
+    <p:sldId id="265" r:id="rId11"/>
+    <p:sldId id="266" r:id="rId12"/>
   </p:sldIdLst>
   <p:notesMasterIdLst>
-    <p:notesMasterId r:id="rId11"/>
+    <p:notesMasterId r:id="rId13"/>
   </p:notesMasterIdLst>
   <p:sldSz cx="12191695" cy="6858000"/>
   <p:notesSz cx="6858000" cy="12191695"/>
@@ -534,6 +536,182 @@
             <a:fld id="{F7021451-1387-4CA6-816F-3879F97B5CBC}" type="slidenum">
               <a:rPr lang="en-US"/>
               <a:t>1</a:t>
+            </a:fld>
+            <a:endParaRPr lang="en-US"/>
+          </a:p>
+        </p:txBody>
+      </p:sp>
+    </p:spTree>
+    <p:extLst>
+      <p:ext uri="{BB962C8B-B14F-4D97-AF65-F5344CB8AC3E}">
+        <p14:creationId xmlns:p14="http://schemas.microsoft.com/office/powerpoint/2010/main" val="1024086991"/>
+      </p:ext>
+    </p:extLst>
+  </p:cSld>
+  <p:clrMapOvr>
+    <a:masterClrMapping/>
+  </p:clrMapOvr>
+</p:notes>
+</file>
+
+<file path=ppt/notesSlides/notesSlide10.xml><?xml version="1.0" encoding="utf-8"?>
+<p:notes xmlns:a="http://schemas.openxmlformats.org/drawingml/2006/main" xmlns:r="http://schemas.openxmlformats.org/officeDocument/2006/relationships" xmlns:p="http://schemas.openxmlformats.org/presentationml/2006/main">
+  <p:cSld>
+    <p:spTree>
+      <p:nvGrpSpPr>
+        <p:cNvPr id="1" name=""/>
+        <p:cNvGrpSpPr/>
+        <p:nvPr/>
+      </p:nvGrpSpPr>
+      <p:grpSpPr>
+        <a:xfrm>
+          <a:off x="0" y="0"/>
+          <a:ext cx="0" cy="0"/>
+          <a:chOff x="0" y="0"/>
+          <a:chExt cx="0" cy="0"/>
+        </a:xfrm>
+      </p:grpSpPr>
+      <p:sp>
+        <p:nvSpPr>
+          <p:cNvPr id="2" name="Slide Image Placeholder 1"/>
+          <p:cNvSpPr>
+            <a:spLocks noGrp="1" noRot="1" noChangeAspect="1"/>
+          </p:cNvSpPr>
+          <p:nvPr>
+            <p:ph type="sldImg"/>
+          </p:nvPr>
+        </p:nvSpPr>
+        <p:spPr/>
+      </p:sp>
+      <p:sp>
+        <p:nvSpPr>
+          <p:cNvPr id="3" name="Notes Placeholder 2"/>
+          <p:cNvSpPr>
+            <a:spLocks noGrp="1"/>
+          </p:cNvSpPr>
+          <p:nvPr>
+            <p:ph type="body" idx="1"/>
+          </p:nvPr>
+        </p:nvSpPr>
+        <p:spPr/>
+        <p:txBody>
+          <a:bodyPr/>
+          <a:lstStyle/>
+          <a:p>
+            <a:r>
+              <a:rPr lang="en-US" dirty="0"/>
+              <a:t/>
+            </a:r>
+            <a:endParaRPr lang="en-US" dirty="0"/>
+          </a:p>
+        </p:txBody>
+      </p:sp>
+      <p:sp>
+        <p:nvSpPr>
+          <p:cNvPr id="4" name="Slide Number Placeholder 3"/>
+          <p:cNvSpPr>
+            <a:spLocks noGrp="1"/>
+          </p:cNvSpPr>
+          <p:nvPr>
+            <p:ph type="sldNum" sz="quarter" idx="10"/>
+          </p:nvPr>
+        </p:nvSpPr>
+        <p:spPr/>
+        <p:txBody>
+          <a:bodyPr/>
+          <a:lstStyle/>
+          <a:p>
+            <a:fld id="{F7021451-1387-4CA6-816F-3879F97B5CBC}" type="slidenum">
+              <a:rPr lang="en-US"/>
+              <a:t>10</a:t>
+            </a:fld>
+            <a:endParaRPr lang="en-US"/>
+          </a:p>
+        </p:txBody>
+      </p:sp>
+    </p:spTree>
+    <p:extLst>
+      <p:ext uri="{BB962C8B-B14F-4D97-AF65-F5344CB8AC3E}">
+        <p14:creationId xmlns:p14="http://schemas.microsoft.com/office/powerpoint/2010/main" val="1024086991"/>
+      </p:ext>
+    </p:extLst>
+  </p:cSld>
+  <p:clrMapOvr>
+    <a:masterClrMapping/>
+  </p:clrMapOvr>
+</p:notes>
+</file>
+
+<file path=ppt/notesSlides/notesSlide11.xml><?xml version="1.0" encoding="utf-8"?>
+<p:notes xmlns:a="http://schemas.openxmlformats.org/drawingml/2006/main" xmlns:r="http://schemas.openxmlformats.org/officeDocument/2006/relationships" xmlns:p="http://schemas.openxmlformats.org/presentationml/2006/main">
+  <p:cSld>
+    <p:spTree>
+      <p:nvGrpSpPr>
+        <p:cNvPr id="1" name=""/>
+        <p:cNvGrpSpPr/>
+        <p:nvPr/>
+      </p:nvGrpSpPr>
+      <p:grpSpPr>
+        <a:xfrm>
+          <a:off x="0" y="0"/>
+          <a:ext cx="0" cy="0"/>
+          <a:chOff x="0" y="0"/>
+          <a:chExt cx="0" cy="0"/>
+        </a:xfrm>
+      </p:grpSpPr>
+      <p:sp>
+        <p:nvSpPr>
+          <p:cNvPr id="2" name="Slide Image Placeholder 1"/>
+          <p:cNvSpPr>
+            <a:spLocks noGrp="1" noRot="1" noChangeAspect="1"/>
+          </p:cNvSpPr>
+          <p:nvPr>
+            <p:ph type="sldImg"/>
+          </p:nvPr>
+        </p:nvSpPr>
+        <p:spPr/>
+      </p:sp>
+      <p:sp>
+        <p:nvSpPr>
+          <p:cNvPr id="3" name="Notes Placeholder 2"/>
+          <p:cNvSpPr>
+            <a:spLocks noGrp="1"/>
+          </p:cNvSpPr>
+          <p:nvPr>
+            <p:ph type="body" idx="1"/>
+          </p:nvPr>
+        </p:nvSpPr>
+        <p:spPr/>
+        <p:txBody>
+          <a:bodyPr/>
+          <a:lstStyle/>
+          <a:p>
+            <a:r>
+              <a:rPr lang="en-US" dirty="0"/>
+              <a:t/>
+            </a:r>
+            <a:endParaRPr lang="en-US" dirty="0"/>
+          </a:p>
+        </p:txBody>
+      </p:sp>
+      <p:sp>
+        <p:nvSpPr>
+          <p:cNvPr id="4" name="Slide Number Placeholder 3"/>
+          <p:cNvSpPr>
+            <a:spLocks noGrp="1"/>
+          </p:cNvSpPr>
+          <p:nvPr>
+            <p:ph type="sldNum" sz="quarter" idx="10"/>
+          </p:nvPr>
+        </p:nvSpPr>
+        <p:spPr/>
+        <p:txBody>
+          <a:bodyPr/>
+          <a:lstStyle/>
+          <a:p>
+            <a:fld id="{F7021451-1387-4CA6-816F-3879F97B5CBC}" type="slidenum">
+              <a:rPr lang="en-US"/>
+              <a:t>11</a:t>
             </a:fld>
             <a:endParaRPr lang="en-US"/>
           </a:p>
@@ -1917,6 +2095,913 @@
 </p:sld>
 </file>
 
+<file path=ppt/slides/slide10.xml><?xml version="1.0" encoding="utf-8"?>
+<p:sld xmlns:a="http://schemas.openxmlformats.org/drawingml/2006/main" xmlns:r="http://schemas.openxmlformats.org/officeDocument/2006/relationships" xmlns:p="http://schemas.openxmlformats.org/presentationml/2006/main">
+  <p:cSld name="Slide 10">
+    <p:bg>
+      <p:bgPr>
+        <a:solidFill>
+          <a:srgbClr val="F4F6F9"/>
+        </a:solidFill>
+      </p:bgPr>
+    </p:bg>
+    <p:spTree>
+      <p:nvGrpSpPr>
+        <p:cNvPr id="1" name=""/>
+        <p:cNvGrpSpPr/>
+        <p:nvPr/>
+      </p:nvGrpSpPr>
+      <p:grpSpPr>
+        <a:xfrm>
+          <a:off x="0" y="0"/>
+          <a:ext cx="0" cy="0"/>
+          <a:chOff x="0" y="0"/>
+          <a:chExt cx="0" cy="0"/>
+        </a:xfrm>
+      </p:grpSpPr>
+      <p:sp>
+        <p:nvSpPr>
+          <p:cNvPr id="2" name="Shape 0"/>
+          <p:cNvSpPr/>
+          <p:nvPr/>
+        </p:nvSpPr>
+        <p:spPr>
+          <a:xfrm>
+            <a:off x="0" y="0"/>
+            <a:ext cx="164592" cy="6858000"/>
+          </a:xfrm>
+          <a:prstGeom prst="rect">
+            <a:avLst/>
+          </a:prstGeom>
+          <a:solidFill>
+            <a:srgbClr val="C0152F"/>
+          </a:solidFill>
+          <a:ln/>
+        </p:spPr>
+      </p:sp>
+      <p:sp>
+        <p:nvSpPr>
+          <p:cNvPr id="3" name="Text 1"/>
+          <p:cNvSpPr/>
+          <p:nvPr/>
+        </p:nvSpPr>
+        <p:spPr>
+          <a:xfrm>
+            <a:off x="502920" y="384048"/>
+            <a:ext cx="8229600" cy="365760"/>
+          </a:xfrm>
+          <a:prstGeom prst="rect">
+            <a:avLst/>
+          </a:prstGeom>
+          <a:noFill/>
+          <a:ln/>
+        </p:spPr>
+        <p:txBody>
+          <a:bodyPr wrap="square" rtlCol="0" anchor="ctr"/>
+          <a:lstStyle/>
+          <a:p>
+            <a:pPr indent="0" marL="0">
+              <a:buNone/>
+            </a:pPr>
+            <a:r>
+              <a:rPr lang="en-US" sz="1200" b="1" spc="200" kern="0" dirty="0">
+                <a:solidFill>
+                  <a:srgbClr val="C0152F"/>
+                </a:solidFill>
+                <a:latin typeface="Calibri" pitchFamily="34" charset="0"/>
+                <a:ea typeface="Calibri" pitchFamily="34" charset="-122"/>
+                <a:cs typeface="Calibri" pitchFamily="34" charset="-120"/>
+              </a:rPr>
+              <a:t>FOR NEPAL  </a:t>
+            </a:r>
+            <a:pPr indent="0" marL="0">
+              <a:buNone/>
+            </a:pPr>
+            <a:r>
+              <a:rPr lang="en-US" sz="1200" spc="200" kern="0" dirty="0">
+                <a:solidFill>
+                  <a:srgbClr val="0E7C86"/>
+                </a:solidFill>
+                <a:latin typeface="Calibri" pitchFamily="34" charset="0"/>
+                <a:ea typeface="Calibri" pitchFamily="34" charset="-122"/>
+                <a:cs typeface="Calibri" pitchFamily="34" charset="-120"/>
+              </a:rPr>
+              <a:t>नेपालका लागि</a:t>
+            </a:r>
+            <a:endParaRPr lang="en-US" sz="1200" dirty="0"/>
+          </a:p>
+        </p:txBody>
+      </p:sp>
+      <p:sp>
+        <p:nvSpPr>
+          <p:cNvPr id="4" name="Text 2"/>
+          <p:cNvSpPr/>
+          <p:nvPr/>
+        </p:nvSpPr>
+        <p:spPr>
+          <a:xfrm>
+            <a:off x="475488" y="777240"/>
+            <a:ext cx="10789920" cy="914400"/>
+          </a:xfrm>
+          <a:prstGeom prst="rect">
+            <a:avLst/>
+          </a:prstGeom>
+          <a:noFill/>
+          <a:ln/>
+        </p:spPr>
+        <p:txBody>
+          <a:bodyPr wrap="square" rtlCol="0" anchor="ctr"/>
+          <a:lstStyle/>
+          <a:p>
+            <a:pPr indent="0" marL="0">
+              <a:buNone/>
+            </a:pPr>
+            <a:r>
+              <a:rPr lang="en-US" sz="3300" b="1" dirty="0">
+                <a:solidFill>
+                  <a:srgbClr val="12233B"/>
+                </a:solidFill>
+                <a:latin typeface="Georgia" pitchFamily="34" charset="0"/>
+                <a:ea typeface="Georgia" pitchFamily="34" charset="-122"/>
+                <a:cs typeface="Georgia" pitchFamily="34" charset="-120"/>
+              </a:rPr>
+              <a:t>What this puts in Nepal's hands</a:t>
+            </a:r>
+            <a:endParaRPr lang="en-US" sz="3300" dirty="0"/>
+          </a:p>
+        </p:txBody>
+      </p:sp>
+      <p:sp>
+        <p:nvSpPr>
+          <p:cNvPr id="5" name="Shape 3"/>
+          <p:cNvSpPr/>
+          <p:nvPr/>
+        </p:nvSpPr>
+        <p:spPr>
+          <a:xfrm>
+            <a:off x="640080" y="2057400"/>
+            <a:ext cx="566928" cy="566928"/>
+          </a:xfrm>
+          <a:prstGeom prst="ellipse">
+            <a:avLst/>
+          </a:prstGeom>
+          <a:solidFill>
+            <a:srgbClr val="0E7C86"/>
+          </a:solidFill>
+          <a:ln/>
+        </p:spPr>
+      </p:sp>
+      <p:sp>
+        <p:nvSpPr>
+          <p:cNvPr id="6" name="Text 4"/>
+          <p:cNvSpPr/>
+          <p:nvPr/>
+        </p:nvSpPr>
+        <p:spPr>
+          <a:xfrm>
+            <a:off x="640080" y="2057400"/>
+            <a:ext cx="566928" cy="566928"/>
+          </a:xfrm>
+          <a:prstGeom prst="rect">
+            <a:avLst/>
+          </a:prstGeom>
+          <a:noFill/>
+          <a:ln/>
+        </p:spPr>
+        <p:txBody>
+          <a:bodyPr wrap="square" rtlCol="0" anchor="ctr"/>
+          <a:lstStyle/>
+          <a:p>
+            <a:pPr algn="ctr" indent="0" marL="0">
+              <a:buNone/>
+            </a:pPr>
+            <a:r>
+              <a:rPr lang="en-US" sz="2200" b="1" dirty="0">
+                <a:solidFill>
+                  <a:srgbClr val="FFFFFF"/>
+                </a:solidFill>
+                <a:latin typeface="Georgia" pitchFamily="34" charset="0"/>
+                <a:ea typeface="Georgia" pitchFamily="34" charset="-122"/>
+                <a:cs typeface="Georgia" pitchFamily="34" charset="-120"/>
+              </a:rPr>
+              <a:t>1</a:t>
+            </a:r>
+            <a:endParaRPr lang="en-US" sz="2200" dirty="0"/>
+          </a:p>
+        </p:txBody>
+      </p:sp>
+      <p:sp>
+        <p:nvSpPr>
+          <p:cNvPr id="7" name="Text 5"/>
+          <p:cNvSpPr/>
+          <p:nvPr/>
+        </p:nvSpPr>
+        <p:spPr>
+          <a:xfrm>
+            <a:off x="1417320" y="2020824"/>
+            <a:ext cx="9829800" cy="384048"/>
+          </a:xfrm>
+          <a:prstGeom prst="rect">
+            <a:avLst/>
+          </a:prstGeom>
+          <a:noFill/>
+          <a:ln/>
+        </p:spPr>
+        <p:txBody>
+          <a:bodyPr wrap="square" rtlCol="0" anchor="ctr"/>
+          <a:lstStyle/>
+          <a:p>
+            <a:pPr indent="0" marL="0">
+              <a:buNone/>
+            </a:pPr>
+            <a:r>
+              <a:rPr lang="en-US" sz="1700" b="1" dirty="0">
+                <a:solidFill>
+                  <a:srgbClr val="12233B"/>
+                </a:solidFill>
+                <a:latin typeface="Calibri" pitchFamily="34" charset="0"/>
+                <a:ea typeface="Calibri" pitchFamily="34" charset="-122"/>
+                <a:cs typeface="Calibri" pitchFamily="34" charset="-120"/>
+              </a:rPr>
+              <a:t>A planning instrument for the gap</a:t>
+            </a:r>
+            <a:endParaRPr lang="en-US" sz="1700" dirty="0"/>
+          </a:p>
+        </p:txBody>
+      </p:sp>
+      <p:sp>
+        <p:nvSpPr>
+          <p:cNvPr id="8" name="Text 6"/>
+          <p:cNvSpPr/>
+          <p:nvPr/>
+        </p:nvSpPr>
+        <p:spPr>
+          <a:xfrm>
+            <a:off x="1417320" y="2423160"/>
+            <a:ext cx="9829800" cy="914400"/>
+          </a:xfrm>
+          <a:prstGeom prst="rect">
+            <a:avLst/>
+          </a:prstGeom>
+          <a:noFill/>
+          <a:ln/>
+        </p:spPr>
+        <p:txBody>
+          <a:bodyPr wrap="square" rtlCol="0" anchor="ctr"/>
+          <a:lstStyle/>
+          <a:p>
+            <a:pPr indent="0" marL="0">
+              <a:lnSpc>
+                <a:spcPct val="102000"/>
+              </a:lnSpc>
+              <a:buNone/>
+            </a:pPr>
+            <a:r>
+              <a:rPr lang="en-US" sz="1300" dirty="0">
+                <a:solidFill>
+                  <a:srgbClr val="5B6B7D"/>
+                </a:solidFill>
+                <a:latin typeface="Calibri" pitchFamily="34" charset="0"/>
+                <a:ea typeface="Calibri" pitchFamily="34" charset="-122"/>
+                <a:cs typeface="Calibri" pitchFamily="34" charset="-120"/>
+              </a:rPr>
+              <a:t>Which sectors lost their pipeline in 2025 — health and governance most — so the budget can respond with evidence, not guesswork.</a:t>
+            </a:r>
+            <a:endParaRPr lang="en-US" sz="1300" dirty="0"/>
+          </a:p>
+        </p:txBody>
+      </p:sp>
+      <p:sp>
+        <p:nvSpPr>
+          <p:cNvPr id="9" name="Shape 7"/>
+          <p:cNvSpPr/>
+          <p:nvPr/>
+        </p:nvSpPr>
+        <p:spPr>
+          <a:xfrm>
+            <a:off x="640080" y="3429000"/>
+            <a:ext cx="566928" cy="566928"/>
+          </a:xfrm>
+          <a:prstGeom prst="ellipse">
+            <a:avLst/>
+          </a:prstGeom>
+          <a:solidFill>
+            <a:srgbClr val="0D2440"/>
+          </a:solidFill>
+          <a:ln/>
+        </p:spPr>
+      </p:sp>
+      <p:sp>
+        <p:nvSpPr>
+          <p:cNvPr id="10" name="Text 8"/>
+          <p:cNvSpPr/>
+          <p:nvPr/>
+        </p:nvSpPr>
+        <p:spPr>
+          <a:xfrm>
+            <a:off x="640080" y="3429000"/>
+            <a:ext cx="566928" cy="566928"/>
+          </a:xfrm>
+          <a:prstGeom prst="rect">
+            <a:avLst/>
+          </a:prstGeom>
+          <a:noFill/>
+          <a:ln/>
+        </p:spPr>
+        <p:txBody>
+          <a:bodyPr wrap="square" rtlCol="0" anchor="ctr"/>
+          <a:lstStyle/>
+          <a:p>
+            <a:pPr algn="ctr" indent="0" marL="0">
+              <a:buNone/>
+            </a:pPr>
+            <a:r>
+              <a:rPr lang="en-US" sz="2200" b="1" dirty="0">
+                <a:solidFill>
+                  <a:srgbClr val="FFFFFF"/>
+                </a:solidFill>
+                <a:latin typeface="Georgia" pitchFamily="34" charset="0"/>
+                <a:ea typeface="Georgia" pitchFamily="34" charset="-122"/>
+                <a:cs typeface="Georgia" pitchFamily="34" charset="-120"/>
+              </a:rPr>
+              <a:t>2</a:t>
+            </a:r>
+            <a:endParaRPr lang="en-US" sz="2200" dirty="0"/>
+          </a:p>
+        </p:txBody>
+      </p:sp>
+      <p:sp>
+        <p:nvSpPr>
+          <p:cNvPr id="11" name="Text 9"/>
+          <p:cNvSpPr/>
+          <p:nvPr/>
+        </p:nvSpPr>
+        <p:spPr>
+          <a:xfrm>
+            <a:off x="1417320" y="3392424"/>
+            <a:ext cx="9829800" cy="384048"/>
+          </a:xfrm>
+          <a:prstGeom prst="rect">
+            <a:avLst/>
+          </a:prstGeom>
+          <a:noFill/>
+          <a:ln/>
+        </p:spPr>
+        <p:txBody>
+          <a:bodyPr wrap="square" rtlCol="0" anchor="ctr"/>
+          <a:lstStyle/>
+          <a:p>
+            <a:pPr indent="0" marL="0">
+              <a:buNone/>
+            </a:pPr>
+            <a:r>
+              <a:rPr lang="en-US" sz="1700" b="1" dirty="0">
+                <a:solidFill>
+                  <a:srgbClr val="12233B"/>
+                </a:solidFill>
+                <a:latin typeface="Calibri" pitchFamily="34" charset="0"/>
+                <a:ea typeface="Calibri" pitchFamily="34" charset="-122"/>
+                <a:cs typeface="Calibri" pitchFamily="34" charset="-120"/>
+              </a:rPr>
+              <a:t>Information sovereignty</a:t>
+            </a:r>
+            <a:endParaRPr lang="en-US" sz="1700" dirty="0"/>
+          </a:p>
+        </p:txBody>
+      </p:sp>
+      <p:sp>
+        <p:nvSpPr>
+          <p:cNvPr id="12" name="Text 10"/>
+          <p:cNvSpPr/>
+          <p:nvPr/>
+        </p:nvSpPr>
+        <p:spPr>
+          <a:xfrm>
+            <a:off x="1417320" y="3794760"/>
+            <a:ext cx="9829800" cy="914400"/>
+          </a:xfrm>
+          <a:prstGeom prst="rect">
+            <a:avLst/>
+          </a:prstGeom>
+          <a:noFill/>
+          <a:ln/>
+        </p:spPr>
+        <p:txBody>
+          <a:bodyPr wrap="square" rtlCol="0" anchor="ctr"/>
+          <a:lstStyle/>
+          <a:p>
+            <a:pPr indent="0" marL="0">
+              <a:lnSpc>
+                <a:spcPct val="102000"/>
+              </a:lnSpc>
+              <a:buNone/>
+            </a:pPr>
+            <a:r>
+              <a:rPr lang="en-US" sz="1300" dirty="0">
+                <a:solidFill>
+                  <a:srgbClr val="5B6B7D"/>
+                </a:solidFill>
+                <a:latin typeface="Calibri" pitchFamily="34" charset="0"/>
+                <a:ea typeface="Calibri" pitchFamily="34" charset="-122"/>
+                <a:cs typeface="Calibri" pitchFamily="34" charset="-120"/>
+              </a:rPr>
+              <a:t>Nepal stops depending on foreign portals it cannot control. The record is archived here and updates from Nepal's own AMIS / DCR system.</a:t>
+            </a:r>
+            <a:endParaRPr lang="en-US" sz="1300" dirty="0"/>
+          </a:p>
+        </p:txBody>
+      </p:sp>
+      <p:sp>
+        <p:nvSpPr>
+          <p:cNvPr id="13" name="Shape 11"/>
+          <p:cNvSpPr/>
+          <p:nvPr/>
+        </p:nvSpPr>
+        <p:spPr>
+          <a:xfrm>
+            <a:off x="640080" y="4800600"/>
+            <a:ext cx="566928" cy="566928"/>
+          </a:xfrm>
+          <a:prstGeom prst="ellipse">
+            <a:avLst/>
+          </a:prstGeom>
+          <a:solidFill>
+            <a:srgbClr val="E08A00"/>
+          </a:solidFill>
+          <a:ln/>
+        </p:spPr>
+      </p:sp>
+      <p:sp>
+        <p:nvSpPr>
+          <p:cNvPr id="14" name="Text 12"/>
+          <p:cNvSpPr/>
+          <p:nvPr/>
+        </p:nvSpPr>
+        <p:spPr>
+          <a:xfrm>
+            <a:off x="640080" y="4800600"/>
+            <a:ext cx="566928" cy="566928"/>
+          </a:xfrm>
+          <a:prstGeom prst="rect">
+            <a:avLst/>
+          </a:prstGeom>
+          <a:noFill/>
+          <a:ln/>
+        </p:spPr>
+        <p:txBody>
+          <a:bodyPr wrap="square" rtlCol="0" anchor="ctr"/>
+          <a:lstStyle/>
+          <a:p>
+            <a:pPr algn="ctr" indent="0" marL="0">
+              <a:buNone/>
+            </a:pPr>
+            <a:r>
+              <a:rPr lang="en-US" sz="2200" b="1" dirty="0">
+                <a:solidFill>
+                  <a:srgbClr val="FFFFFF"/>
+                </a:solidFill>
+                <a:latin typeface="Georgia" pitchFamily="34" charset="0"/>
+                <a:ea typeface="Georgia" pitchFamily="34" charset="-122"/>
+                <a:cs typeface="Georgia" pitchFamily="34" charset="-120"/>
+              </a:rPr>
+              <a:t>3</a:t>
+            </a:r>
+            <a:endParaRPr lang="en-US" sz="2200" dirty="0"/>
+          </a:p>
+        </p:txBody>
+      </p:sp>
+      <p:sp>
+        <p:nvSpPr>
+          <p:cNvPr id="15" name="Text 13"/>
+          <p:cNvSpPr/>
+          <p:nvPr/>
+        </p:nvSpPr>
+        <p:spPr>
+          <a:xfrm>
+            <a:off x="1417320" y="4764024"/>
+            <a:ext cx="9829800" cy="384048"/>
+          </a:xfrm>
+          <a:prstGeom prst="rect">
+            <a:avLst/>
+          </a:prstGeom>
+          <a:noFill/>
+          <a:ln/>
+        </p:spPr>
+        <p:txBody>
+          <a:bodyPr wrap="square" rtlCol="0" anchor="ctr"/>
+          <a:lstStyle/>
+          <a:p>
+            <a:pPr indent="0" marL="0">
+              <a:buNone/>
+            </a:pPr>
+            <a:r>
+              <a:rPr lang="en-US" sz="1700" b="1" dirty="0">
+                <a:solidFill>
+                  <a:srgbClr val="12233B"/>
+                </a:solidFill>
+                <a:latin typeface="Calibri" pitchFamily="34" charset="0"/>
+                <a:ea typeface="Calibri" pitchFamily="34" charset="-122"/>
+                <a:cs typeface="Calibri" pitchFamily="34" charset="-120"/>
+              </a:rPr>
+              <a:t>A public transparency portal</a:t>
+            </a:r>
+            <a:endParaRPr lang="en-US" sz="1700" dirty="0"/>
+          </a:p>
+        </p:txBody>
+      </p:sp>
+      <p:sp>
+        <p:nvSpPr>
+          <p:cNvPr id="16" name="Text 14"/>
+          <p:cNvSpPr/>
+          <p:nvPr/>
+        </p:nvSpPr>
+        <p:spPr>
+          <a:xfrm>
+            <a:off x="1417320" y="5166360"/>
+            <a:ext cx="9829800" cy="914400"/>
+          </a:xfrm>
+          <a:prstGeom prst="rect">
+            <a:avLst/>
+          </a:prstGeom>
+          <a:noFill/>
+          <a:ln/>
+        </p:spPr>
+        <p:txBody>
+          <a:bodyPr wrap="square" rtlCol="0" anchor="ctr"/>
+          <a:lstStyle/>
+          <a:p>
+            <a:pPr indent="0" marL="0">
+              <a:lnSpc>
+                <a:spcPct val="102000"/>
+              </a:lnSpc>
+              <a:buNone/>
+            </a:pPr>
+            <a:r>
+              <a:rPr lang="en-US" sz="1300" dirty="0">
+                <a:solidFill>
+                  <a:srgbClr val="5B6B7D"/>
+                </a:solidFill>
+                <a:latin typeface="Calibri" pitchFamily="34" charset="0"/>
+                <a:ea typeface="Calibri" pitchFamily="34" charset="-122"/>
+                <a:cs typeface="Calibri" pitchFamily="34" charset="-120"/>
+              </a:rPr>
+              <a:t>The interactive, bilingual companion to the Development Cooperation Report the Ministry of Finance already publishes — for citizens, parliament and partners.</a:t>
+            </a:r>
+            <a:endParaRPr lang="en-US" sz="1300" dirty="0"/>
+          </a:p>
+        </p:txBody>
+      </p:sp>
+      <p:sp>
+        <p:nvSpPr>
+          <p:cNvPr id="17" name="Text 15"/>
+          <p:cNvSpPr/>
+          <p:nvPr/>
+        </p:nvSpPr>
+        <p:spPr>
+          <a:xfrm>
+            <a:off x="502920" y="6437376"/>
+            <a:ext cx="8961120" cy="274320"/>
+          </a:xfrm>
+          <a:prstGeom prst="rect">
+            <a:avLst/>
+          </a:prstGeom>
+          <a:noFill/>
+          <a:ln/>
+        </p:spPr>
+        <p:txBody>
+          <a:bodyPr wrap="square" rtlCol="0" anchor="ctr"/>
+          <a:lstStyle/>
+          <a:p>
+            <a:pPr indent="0" marL="0">
+              <a:buNone/>
+            </a:pPr>
+            <a:r>
+              <a:rPr lang="en-US" sz="900" dirty="0">
+                <a:solidFill>
+                  <a:srgbClr val="5B6B7D"/>
+                </a:solidFill>
+                <a:latin typeface="Calibri" pitchFamily="34" charset="0"/>
+                <a:ea typeface="Calibri" pitchFamily="34" charset="-122"/>
+                <a:cs typeface="Calibri" pitchFamily="34" charset="-120"/>
+              </a:rPr>
+              <a:t>External Development Funding to Nepal  ·  built from primary sources, retrieved 2026</a:t>
+            </a:r>
+            <a:endParaRPr lang="en-US" sz="900" dirty="0"/>
+          </a:p>
+        </p:txBody>
+      </p:sp>
+      <p:sp>
+        <p:nvSpPr>
+          <p:cNvPr id="18" name="Text 16"/>
+          <p:cNvSpPr/>
+          <p:nvPr/>
+        </p:nvSpPr>
+        <p:spPr>
+          <a:xfrm>
+            <a:off x="11338560" y="6400800"/>
+            <a:ext cx="548640" cy="274320"/>
+          </a:xfrm>
+          <a:prstGeom prst="rect">
+            <a:avLst/>
+          </a:prstGeom>
+          <a:noFill/>
+          <a:ln/>
+        </p:spPr>
+        <p:txBody>
+          <a:bodyPr wrap="square" rtlCol="0" anchor="ctr"/>
+          <a:lstStyle/>
+          <a:p>
+            <a:pPr algn="r" indent="0" marL="0">
+              <a:buNone/>
+            </a:pPr>
+            <a:r>
+              <a:rPr lang="en-US" sz="1000" dirty="0">
+                <a:solidFill>
+                  <a:srgbClr val="5B6B7D"/>
+                </a:solidFill>
+                <a:latin typeface="Calibri" pitchFamily="34" charset="0"/>
+                <a:ea typeface="Calibri" pitchFamily="34" charset="-122"/>
+                <a:cs typeface="Calibri" pitchFamily="34" charset="-120"/>
+              </a:rPr>
+              <a:t>10</a:t>
+            </a:r>
+            <a:endParaRPr lang="en-US" sz="1000" dirty="0"/>
+          </a:p>
+        </p:txBody>
+      </p:sp>
+    </p:spTree>
+  </p:cSld>
+  <p:clrMapOvr>
+    <a:masterClrMapping/>
+  </p:clrMapOvr>
+</p:sld>
+</file>
+
+<file path=ppt/slides/slide11.xml><?xml version="1.0" encoding="utf-8"?>
+<p:sld xmlns:a="http://schemas.openxmlformats.org/drawingml/2006/main" xmlns:r="http://schemas.openxmlformats.org/officeDocument/2006/relationships" xmlns:p="http://schemas.openxmlformats.org/presentationml/2006/main">
+  <p:cSld name="Slide 11">
+    <p:bg>
+      <p:bgPr>
+        <a:solidFill>
+          <a:srgbClr val="0D2440"/>
+        </a:solidFill>
+      </p:bgPr>
+    </p:bg>
+    <p:spTree>
+      <p:nvGrpSpPr>
+        <p:cNvPr id="1" name=""/>
+        <p:cNvGrpSpPr/>
+        <p:nvPr/>
+      </p:nvGrpSpPr>
+      <p:grpSpPr>
+        <a:xfrm>
+          <a:off x="0" y="0"/>
+          <a:ext cx="0" cy="0"/>
+          <a:chOff x="0" y="0"/>
+          <a:chExt cx="0" cy="0"/>
+        </a:xfrm>
+      </p:grpSpPr>
+      <p:sp>
+        <p:nvSpPr>
+          <p:cNvPr id="2" name="Shape 0"/>
+          <p:cNvSpPr/>
+          <p:nvPr/>
+        </p:nvSpPr>
+        <p:spPr>
+          <a:xfrm>
+            <a:off x="0" y="0"/>
+            <a:ext cx="12191695" cy="146304"/>
+          </a:xfrm>
+          <a:prstGeom prst="rect">
+            <a:avLst/>
+          </a:prstGeom>
+          <a:solidFill>
+            <a:srgbClr val="0E7C86"/>
+          </a:solidFill>
+          <a:ln/>
+        </p:spPr>
+      </p:sp>
+      <p:sp>
+        <p:nvSpPr>
+          <p:cNvPr id="3" name="Shape 1"/>
+          <p:cNvSpPr/>
+          <p:nvPr/>
+        </p:nvSpPr>
+        <p:spPr>
+          <a:xfrm>
+            <a:off x="0" y="146304"/>
+            <a:ext cx="12191695" cy="54864"/>
+          </a:xfrm>
+          <a:prstGeom prst="rect">
+            <a:avLst/>
+          </a:prstGeom>
+          <a:solidFill>
+            <a:srgbClr val="C0152F"/>
+          </a:solidFill>
+          <a:ln/>
+        </p:spPr>
+      </p:sp>
+      <p:sp>
+        <p:nvSpPr>
+          <p:cNvPr id="4" name="Text 2"/>
+          <p:cNvSpPr/>
+          <p:nvPr/>
+        </p:nvSpPr>
+        <p:spPr>
+          <a:xfrm>
+            <a:off x="731520" y="2286000"/>
+            <a:ext cx="10972800" cy="914400"/>
+          </a:xfrm>
+          <a:prstGeom prst="rect">
+            <a:avLst/>
+          </a:prstGeom>
+          <a:noFill/>
+          <a:ln/>
+        </p:spPr>
+        <p:txBody>
+          <a:bodyPr wrap="square" rtlCol="0" anchor="ctr"/>
+          <a:lstStyle/>
+          <a:p>
+            <a:pPr indent="0" marL="0">
+              <a:buNone/>
+            </a:pPr>
+            <a:r>
+              <a:rPr lang="en-US" sz="4400" b="1" dirty="0">
+                <a:solidFill>
+                  <a:srgbClr val="FFFFFF"/>
+                </a:solidFill>
+                <a:latin typeface="Georgia" pitchFamily="34" charset="0"/>
+                <a:ea typeface="Georgia" pitchFamily="34" charset="-122"/>
+                <a:cs typeface="Georgia" pitchFamily="34" charset="-120"/>
+              </a:rPr>
+              <a:t>The record is Nepal's.</a:t>
+            </a:r>
+            <a:endParaRPr lang="en-US" sz="4400" dirty="0"/>
+          </a:p>
+        </p:txBody>
+      </p:sp>
+      <p:sp>
+        <p:nvSpPr>
+          <p:cNvPr id="5" name="Text 3"/>
+          <p:cNvSpPr/>
+          <p:nvPr/>
+        </p:nvSpPr>
+        <p:spPr>
+          <a:xfrm>
+            <a:off x="749808" y="3566160"/>
+            <a:ext cx="10515600" cy="1097280"/>
+          </a:xfrm>
+          <a:prstGeom prst="rect">
+            <a:avLst/>
+          </a:prstGeom>
+          <a:noFill/>
+          <a:ln/>
+        </p:spPr>
+        <p:txBody>
+          <a:bodyPr wrap="square" rtlCol="0" anchor="ctr"/>
+          <a:lstStyle/>
+          <a:p>
+            <a:pPr indent="0" marL="0">
+              <a:lnSpc>
+                <a:spcPct val="110000"/>
+              </a:lnSpc>
+              <a:buNone/>
+            </a:pPr>
+            <a:r>
+              <a:rPr lang="en-US" sz="1800" dirty="0">
+                <a:solidFill>
+                  <a:srgbClr val="CADCFC"/>
+                </a:solidFill>
+                <a:latin typeface="Calibri" pitchFamily="34" charset="0"/>
+                <a:ea typeface="Calibri" pitchFamily="34" charset="-122"/>
+                <a:cs typeface="Calibri" pitchFamily="34" charset="-120"/>
+              </a:rPr>
+              <a:t>Built from official sources, kept verifiable, told in two languages —</a:t>
+            </a:r>
+            <a:endParaRPr lang="en-US" sz="1800" dirty="0"/>
+          </a:p>
+          <a:p>
+            <a:pPr indent="0" marL="0">
+              <a:lnSpc>
+                <a:spcPct val="110000"/>
+              </a:lnSpc>
+              <a:buNone/>
+            </a:pPr>
+            <a:r>
+              <a:rPr lang="en-US" sz="1800" dirty="0">
+                <a:solidFill>
+                  <a:srgbClr val="CADCFC"/>
+                </a:solidFill>
+                <a:latin typeface="Calibri" pitchFamily="34" charset="0"/>
+                <a:ea typeface="Calibri" pitchFamily="34" charset="-122"/>
+                <a:cs typeface="Calibri" pitchFamily="34" charset="-120"/>
+              </a:rPr>
+              <a:t>so the question “where did the money go?” always has an answer.</a:t>
+            </a:r>
+            <a:endParaRPr lang="en-US" sz="1800" dirty="0"/>
+          </a:p>
+        </p:txBody>
+      </p:sp>
+      <p:sp>
+        <p:nvSpPr>
+          <p:cNvPr id="6" name="Text 4"/>
+          <p:cNvSpPr/>
+          <p:nvPr/>
+        </p:nvSpPr>
+        <p:spPr>
+          <a:xfrm>
+            <a:off x="749808" y="5120640"/>
+            <a:ext cx="10607040" cy="548640"/>
+          </a:xfrm>
+          <a:prstGeom prst="rect">
+            <a:avLst/>
+          </a:prstGeom>
+          <a:noFill/>
+          <a:ln/>
+        </p:spPr>
+        <p:txBody>
+          <a:bodyPr wrap="square" rtlCol="0" anchor="ctr"/>
+          <a:lstStyle/>
+          <a:p>
+            <a:pPr indent="0" marL="0">
+              <a:buNone/>
+            </a:pPr>
+            <a:r>
+              <a:rPr lang="en-US" sz="1400" b="1" dirty="0">
+                <a:solidFill>
+                  <a:srgbClr val="FFFFFF"/>
+                </a:solidFill>
+                <a:latin typeface="Calibri" pitchFamily="34" charset="0"/>
+                <a:ea typeface="Calibri" pitchFamily="34" charset="-122"/>
+                <a:cs typeface="Calibri" pitchFamily="34" charset="-120"/>
+              </a:rPr>
+              <a:t>Discuss next:  </a:t>
+            </a:r>
+            <a:pPr indent="0" marL="0">
+              <a:buNone/>
+            </a:pPr>
+            <a:r>
+              <a:rPr lang="en-US" sz="1400" dirty="0">
+                <a:solidFill>
+                  <a:srgbClr val="9FB6D4"/>
+                </a:solidFill>
+                <a:latin typeface="Calibri" pitchFamily="34" charset="0"/>
+                <a:ea typeface="Calibri" pitchFamily="34" charset="-122"/>
+                <a:cs typeface="Calibri" pitchFamily="34" charset="-120"/>
+              </a:rPr>
+              <a:t>connect it to AMIS  ·  publish it through IECCD  ·  let Nepal contest the classifications</a:t>
+            </a:r>
+            <a:endParaRPr lang="en-US" sz="1400" dirty="0"/>
+          </a:p>
+        </p:txBody>
+      </p:sp>
+      <p:sp>
+        <p:nvSpPr>
+          <p:cNvPr id="7" name="Text 5"/>
+          <p:cNvSpPr/>
+          <p:nvPr/>
+        </p:nvSpPr>
+        <p:spPr>
+          <a:xfrm>
+            <a:off x="749808" y="5897880"/>
+            <a:ext cx="10058400" cy="457200"/>
+          </a:xfrm>
+          <a:prstGeom prst="rect">
+            <a:avLst/>
+          </a:prstGeom>
+          <a:noFill/>
+          <a:ln/>
+        </p:spPr>
+        <p:txBody>
+          <a:bodyPr wrap="square" rtlCol="0" anchor="ctr"/>
+          <a:lstStyle/>
+          <a:p>
+            <a:pPr indent="0" marL="0">
+              <a:buNone/>
+            </a:pPr>
+            <a:r>
+              <a:rPr lang="en-US" sz="1800" i="1" dirty="0">
+                <a:solidFill>
+                  <a:srgbClr val="0E7C86"/>
+                </a:solidFill>
+                <a:latin typeface="Georgia" pitchFamily="34" charset="0"/>
+                <a:ea typeface="Georgia" pitchFamily="34" charset="-122"/>
+                <a:cs typeface="Georgia" pitchFamily="34" charset="-120"/>
+              </a:rPr>
+              <a:t>धन्यवाद  ·  Thank you</a:t>
+            </a:r>
+            <a:endParaRPr lang="en-US" sz="1800" dirty="0"/>
+          </a:p>
+        </p:txBody>
+      </p:sp>
+    </p:spTree>
+  </p:cSld>
+  <p:clrMapOvr>
+    <a:masterClrMapping/>
+  </p:clrMapOvr>
+</p:sld>
+</file>
+
 <file path=ppt/slides/slide2.xml><?xml version="1.0" encoding="utf-8"?>
 <p:sld xmlns:a="http://schemas.openxmlformats.org/drawingml/2006/main" xmlns:r="http://schemas.openxmlformats.org/officeDocument/2006/relationships" xmlns:p="http://schemas.openxmlformats.org/presentationml/2006/main">
   <p:cSld name="Slide 2">
@@ -5746,7 +6831,7 @@
                 <a:ea typeface="Georgia" pitchFamily="34" charset="-122"/>
                 <a:cs typeface="Georgia" pitchFamily="34" charset="-120"/>
               </a:rPr>
-              <a:t>What the international statistics miss</a:t>
+              <a:t>Following the money to where it landed</a:t>
             </a:r>
             <a:endParaRPr lang="en-US" sz="3300" dirty="0"/>
           </a:p>
@@ -5754,18 +6839,57 @@
       </p:sp>
       <p:sp>
         <p:nvSpPr>
-          <p:cNvPr id="5" name="Shape 3"/>
-          <p:cNvSpPr/>
-          <p:nvPr/>
-        </p:nvSpPr>
-        <p:spPr>
-          <a:xfrm>
-            <a:off x="640080" y="2103120"/>
-            <a:ext cx="5303520" cy="3657600"/>
+          <p:cNvPr id="5" name="Text 3"/>
+          <p:cNvSpPr/>
+          <p:nvPr/>
+        </p:nvSpPr>
+        <p:spPr>
+          <a:xfrm>
+            <a:off x="502920" y="1783080"/>
+            <a:ext cx="10972800" cy="365760"/>
+          </a:xfrm>
+          <a:prstGeom prst="rect">
+            <a:avLst/>
+          </a:prstGeom>
+          <a:noFill/>
+          <a:ln/>
+        </p:spPr>
+        <p:txBody>
+          <a:bodyPr wrap="square" rtlCol="0" anchor="ctr"/>
+          <a:lstStyle/>
+          <a:p>
+            <a:pPr indent="0" marL="0">
+              <a:buNone/>
+            </a:pPr>
+            <a:r>
+              <a:rPr lang="en-US" sz="1500" dirty="0">
+                <a:solidFill>
+                  <a:srgbClr val="5B6B7D"/>
+                </a:solidFill>
+                <a:latin typeface="Calibri" pitchFamily="34" charset="0"/>
+                <a:ea typeface="Calibri" pitchFamily="34" charset="-122"/>
+                <a:cs typeface="Calibri" pitchFamily="34" charset="-120"/>
+              </a:rPr>
+              <a:t>Big partners win the awards, but much is sub-granted onward — now traceable down to the district.</a:t>
+            </a:r>
+            <a:endParaRPr lang="en-US" sz="1500" dirty="0"/>
+          </a:p>
+        </p:txBody>
+      </p:sp>
+      <p:sp>
+        <p:nvSpPr>
+          <p:cNvPr id="6" name="Shape 4"/>
+          <p:cNvSpPr/>
+          <p:nvPr/>
+        </p:nvSpPr>
+        <p:spPr>
+          <a:xfrm>
+            <a:off x="640080" y="2468880"/>
+            <a:ext cx="3520440" cy="1691640"/>
           </a:xfrm>
           <a:prstGeom prst="roundRect">
             <a:avLst>
-              <a:gd name="adj" fmla="val 2000"/>
+              <a:gd name="adj" fmla="val 4324"/>
             </a:avLst>
           </a:prstGeom>
           <a:solidFill>
@@ -5777,142 +6901,127 @@
             </a:solidFill>
             <a:prstDash val="solid"/>
           </a:ln>
-        </p:spPr>
-      </p:sp>
-      <p:sp>
-        <p:nvSpPr>
-          <p:cNvPr id="6" name="Text 4"/>
-          <p:cNvSpPr/>
-          <p:nvPr/>
-        </p:nvSpPr>
-        <p:spPr>
-          <a:xfrm>
-            <a:off x="914400" y="2331720"/>
-            <a:ext cx="4572000" cy="457200"/>
-          </a:xfrm>
-          <a:prstGeom prst="rect">
-            <a:avLst/>
-          </a:prstGeom>
-          <a:noFill/>
-          <a:ln/>
-        </p:spPr>
-        <p:txBody>
-          <a:bodyPr wrap="square" rtlCol="0" anchor="ctr"/>
-          <a:lstStyle/>
-          <a:p>
-            <a:pPr indent="0" marL="0">
-              <a:buNone/>
-            </a:pPr>
-            <a:r>
-              <a:rPr lang="en-US" sz="2400" b="1" dirty="0">
-                <a:solidFill>
-                  <a:srgbClr val="0D2440"/>
+          <a:effectLst>
+            <a:outerShdw sx="100000" sy="100000" kx="0" ky="0" algn="bl" rotWithShape="0" blurRad="114300" dist="25400" dir="5400000">
+              <a:srgbClr val="8895A7">
+                <a:alpha val="10000"/>
+              </a:srgbClr>
+            </a:outerShdw>
+          </a:effectLst>
+        </p:spPr>
+      </p:sp>
+      <p:sp>
+        <p:nvSpPr>
+          <p:cNvPr id="7" name="Shape 5"/>
+          <p:cNvSpPr/>
+          <p:nvPr/>
+        </p:nvSpPr>
+        <p:spPr>
+          <a:xfrm>
+            <a:off x="640080" y="2761488"/>
+            <a:ext cx="64008" cy="1106424"/>
+          </a:xfrm>
+          <a:prstGeom prst="rect">
+            <a:avLst/>
+          </a:prstGeom>
+          <a:solidFill>
+            <a:srgbClr val="0E7C86"/>
+          </a:solidFill>
+          <a:ln/>
+        </p:spPr>
+      </p:sp>
+      <p:sp>
+        <p:nvSpPr>
+          <p:cNvPr id="8" name="Text 6"/>
+          <p:cNvSpPr/>
+          <p:nvPr/>
+        </p:nvSpPr>
+        <p:spPr>
+          <a:xfrm>
+            <a:off x="896112" y="2633472"/>
+            <a:ext cx="3063240" cy="868680"/>
+          </a:xfrm>
+          <a:prstGeom prst="rect">
+            <a:avLst/>
+          </a:prstGeom>
+          <a:noFill/>
+          <a:ln/>
+        </p:spPr>
+        <p:txBody>
+          <a:bodyPr wrap="square" rtlCol="0" anchor="ctr"/>
+          <a:lstStyle/>
+          <a:p>
+            <a:pPr indent="0" marL="0">
+              <a:buNone/>
+            </a:pPr>
+            <a:r>
+              <a:rPr lang="en-US" sz="3400" b="1" dirty="0">
+                <a:solidFill>
+                  <a:srgbClr val="0E7C86"/>
                 </a:solidFill>
                 <a:latin typeface="Georgia" pitchFamily="34" charset="0"/>
                 <a:ea typeface="Georgia" pitchFamily="34" charset="-122"/>
                 <a:cs typeface="Georgia" pitchFamily="34" charset="-120"/>
               </a:rPr>
-              <a:t>India</a:t>
-            </a:r>
-            <a:endParaRPr lang="en-US" sz="2400" dirty="0"/>
-          </a:p>
-        </p:txBody>
-      </p:sp>
-      <p:sp>
-        <p:nvSpPr>
-          <p:cNvPr id="7" name="Text 5"/>
-          <p:cNvSpPr/>
-          <p:nvPr/>
-        </p:nvSpPr>
-        <p:spPr>
-          <a:xfrm>
-            <a:off x="914400" y="2880360"/>
-            <a:ext cx="4572000" cy="731520"/>
-          </a:xfrm>
-          <a:prstGeom prst="rect">
-            <a:avLst/>
-          </a:prstGeom>
-          <a:noFill/>
-          <a:ln/>
-        </p:spPr>
-        <p:txBody>
-          <a:bodyPr wrap="square" rtlCol="0" anchor="ctr"/>
-          <a:lstStyle/>
-          <a:p>
-            <a:pPr indent="0" marL="0">
-              <a:buNone/>
-            </a:pPr>
-            <a:r>
-              <a:rPr lang="en-US" sz="4000" b="1" dirty="0">
-                <a:solidFill>
-                  <a:srgbClr val="0E7C86"/>
-                </a:solidFill>
-                <a:latin typeface="Georgia" pitchFamily="34" charset="0"/>
-                <a:ea typeface="Georgia" pitchFamily="34" charset="-122"/>
-                <a:cs typeface="Georgia" pitchFamily="34" charset="-120"/>
-              </a:rPr>
-              <a:t>$99.8m</a:t>
-            </a:r>
-            <a:endParaRPr lang="en-US" sz="4000" dirty="0"/>
-          </a:p>
-        </p:txBody>
-      </p:sp>
-      <p:sp>
-        <p:nvSpPr>
-          <p:cNvPr id="8" name="Text 6"/>
-          <p:cNvSpPr/>
-          <p:nvPr/>
-        </p:nvSpPr>
-        <p:spPr>
-          <a:xfrm>
-            <a:off x="914400" y="3749040"/>
-            <a:ext cx="4754880" cy="1737360"/>
-          </a:xfrm>
-          <a:prstGeom prst="rect">
-            <a:avLst/>
-          </a:prstGeom>
-          <a:noFill/>
-          <a:ln/>
-        </p:spPr>
-        <p:txBody>
-          <a:bodyPr wrap="square" rtlCol="0" anchor="ctr"/>
-          <a:lstStyle/>
-          <a:p>
-            <a:pPr indent="0" marL="0">
-              <a:lnSpc>
-                <a:spcPct val="105000"/>
-              </a:lnSpc>
-              <a:buNone/>
-            </a:pPr>
-            <a:r>
-              <a:rPr lang="en-US" sz="1400" dirty="0">
-                <a:solidFill>
-                  <a:srgbClr val="5B6B7D"/>
-                </a:solidFill>
-                <a:latin typeface="Calibri" pitchFamily="34" charset="0"/>
-                <a:ea typeface="Calibri" pitchFamily="34" charset="-122"/>
-                <a:cs typeface="Calibri" pitchFamily="34" charset="-120"/>
-              </a:rPr>
-              <a:t>Nepal's largest bilateral donor in FY2022/23 — and almost invisible in OECD data, because India does not report to it. Only Nepal's own books capture it.</a:t>
-            </a:r>
-            <a:endParaRPr lang="en-US" sz="1400" dirty="0"/>
-          </a:p>
-        </p:txBody>
-      </p:sp>
-      <p:sp>
-        <p:nvSpPr>
-          <p:cNvPr id="9" name="Shape 7"/>
-          <p:cNvSpPr/>
-          <p:nvPr/>
-        </p:nvSpPr>
-        <p:spPr>
-          <a:xfrm>
-            <a:off x="6263640" y="2103120"/>
-            <a:ext cx="5257800" cy="3657600"/>
+              <a:t>$1.06bn</a:t>
+            </a:r>
+            <a:endParaRPr lang="en-US" sz="3400" dirty="0"/>
+          </a:p>
+        </p:txBody>
+      </p:sp>
+      <p:sp>
+        <p:nvSpPr>
+          <p:cNvPr id="9" name="Text 7"/>
+          <p:cNvSpPr/>
+          <p:nvPr/>
+        </p:nvSpPr>
+        <p:spPr>
+          <a:xfrm>
+            <a:off x="896112" y="3419856"/>
+            <a:ext cx="3108960" cy="603504"/>
+          </a:xfrm>
+          <a:prstGeom prst="rect">
+            <a:avLst/>
+          </a:prstGeom>
+          <a:noFill/>
+          <a:ln/>
+        </p:spPr>
+        <p:txBody>
+          <a:bodyPr wrap="square" rtlCol="0" anchor="t"/>
+          <a:lstStyle/>
+          <a:p>
+            <a:pPr indent="0" marL="0">
+              <a:buNone/>
+            </a:pPr>
+            <a:r>
+              <a:rPr lang="en-US" sz="1250" dirty="0">
+                <a:solidFill>
+                  <a:srgbClr val="12233B"/>
+                </a:solidFill>
+                <a:latin typeface="Calibri" pitchFamily="34" charset="0"/>
+                <a:ea typeface="Calibri" pitchFamily="34" charset="-122"/>
+                <a:cs typeface="Calibri" pitchFamily="34" charset="-120"/>
+              </a:rPr>
+              <a:t>sub-granted onward from the largest projects — about half of what was obligated</a:t>
+            </a:r>
+            <a:endParaRPr lang="en-US" sz="1250" dirty="0"/>
+          </a:p>
+        </p:txBody>
+      </p:sp>
+      <p:sp>
+        <p:nvSpPr>
+          <p:cNvPr id="10" name="Shape 8"/>
+          <p:cNvSpPr/>
+          <p:nvPr/>
+        </p:nvSpPr>
+        <p:spPr>
+          <a:xfrm>
+            <a:off x="4343400" y="2468880"/>
+            <a:ext cx="3520440" cy="1691640"/>
           </a:xfrm>
           <a:prstGeom prst="roundRect">
             <a:avLst>
-              <a:gd name="adj" fmla="val 2000"/>
+              <a:gd name="adj" fmla="val 4324"/>
             </a:avLst>
           </a:prstGeom>
           <a:solidFill>
@@ -5924,34 +7033,61 @@
             </a:solidFill>
             <a:prstDash val="solid"/>
           </a:ln>
-        </p:spPr>
-      </p:sp>
-      <p:sp>
-        <p:nvSpPr>
-          <p:cNvPr id="10" name="Text 8"/>
-          <p:cNvSpPr/>
-          <p:nvPr/>
-        </p:nvSpPr>
-        <p:spPr>
-          <a:xfrm>
-            <a:off x="6537960" y="2331720"/>
-            <a:ext cx="4572000" cy="457200"/>
-          </a:xfrm>
-          <a:prstGeom prst="rect">
-            <a:avLst/>
-          </a:prstGeom>
-          <a:noFill/>
-          <a:ln/>
-        </p:spPr>
-        <p:txBody>
-          <a:bodyPr wrap="square" rtlCol="0" anchor="ctr"/>
-          <a:lstStyle/>
-          <a:p>
-            <a:pPr indent="0" marL="0">
-              <a:buNone/>
-            </a:pPr>
-            <a:r>
-              <a:rPr lang="en-US" sz="2400" b="1" dirty="0">
+          <a:effectLst>
+            <a:outerShdw sx="100000" sy="100000" kx="0" ky="0" algn="bl" rotWithShape="0" blurRad="114300" dist="25400" dir="5400000">
+              <a:srgbClr val="8895A7">
+                <a:alpha val="10000"/>
+              </a:srgbClr>
+            </a:outerShdw>
+          </a:effectLst>
+        </p:spPr>
+      </p:sp>
+      <p:sp>
+        <p:nvSpPr>
+          <p:cNvPr id="11" name="Shape 9"/>
+          <p:cNvSpPr/>
+          <p:nvPr/>
+        </p:nvSpPr>
+        <p:spPr>
+          <a:xfrm>
+            <a:off x="4343400" y="2761488"/>
+            <a:ext cx="64008" cy="1106424"/>
+          </a:xfrm>
+          <a:prstGeom prst="rect">
+            <a:avLst/>
+          </a:prstGeom>
+          <a:solidFill>
+            <a:srgbClr val="0D2440"/>
+          </a:solidFill>
+          <a:ln/>
+        </p:spPr>
+      </p:sp>
+      <p:sp>
+        <p:nvSpPr>
+          <p:cNvPr id="12" name="Text 10"/>
+          <p:cNvSpPr/>
+          <p:nvPr/>
+        </p:nvSpPr>
+        <p:spPr>
+          <a:xfrm>
+            <a:off x="4599432" y="2633472"/>
+            <a:ext cx="3063240" cy="868680"/>
+          </a:xfrm>
+          <a:prstGeom prst="rect">
+            <a:avLst/>
+          </a:prstGeom>
+          <a:noFill/>
+          <a:ln/>
+        </p:spPr>
+        <p:txBody>
+          <a:bodyPr wrap="square" rtlCol="0" anchor="ctr"/>
+          <a:lstStyle/>
+          <a:p>
+            <a:pPr indent="0" marL="0">
+              <a:buNone/>
+            </a:pPr>
+            <a:r>
+              <a:rPr lang="en-US" sz="3400" b="1" dirty="0">
                 <a:solidFill>
                   <a:srgbClr val="0D2440"/>
                 </a:solidFill>
@@ -5959,38 +7095,131 @@
                 <a:ea typeface="Georgia" pitchFamily="34" charset="-122"/>
                 <a:cs typeface="Georgia" pitchFamily="34" charset="-120"/>
               </a:rPr>
-              <a:t>China</a:t>
-            </a:r>
-            <a:endParaRPr lang="en-US" sz="2400" dirty="0"/>
-          </a:p>
-        </p:txBody>
-      </p:sp>
-      <p:sp>
-        <p:nvSpPr>
-          <p:cNvPr id="11" name="Text 9"/>
-          <p:cNvSpPr/>
-          <p:nvPr/>
-        </p:nvSpPr>
-        <p:spPr>
-          <a:xfrm>
-            <a:off x="6537960" y="2926080"/>
-            <a:ext cx="4846320" cy="640080"/>
-          </a:xfrm>
-          <a:prstGeom prst="rect">
-            <a:avLst/>
-          </a:prstGeom>
-          <a:noFill/>
-          <a:ln/>
-        </p:spPr>
-        <p:txBody>
-          <a:bodyPr wrap="square" rtlCol="0" anchor="ctr"/>
-          <a:lstStyle/>
-          <a:p>
-            <a:pPr indent="0" marL="0">
-              <a:buNone/>
-            </a:pPr>
-            <a:r>
-              <a:rPr lang="en-US" sz="2600" b="1" dirty="0">
+              <a:t>562</a:t>
+            </a:r>
+            <a:endParaRPr lang="en-US" sz="3400" dirty="0"/>
+          </a:p>
+        </p:txBody>
+      </p:sp>
+      <p:sp>
+        <p:nvSpPr>
+          <p:cNvPr id="13" name="Text 11"/>
+          <p:cNvSpPr/>
+          <p:nvPr/>
+        </p:nvSpPr>
+        <p:spPr>
+          <a:xfrm>
+            <a:off x="4599432" y="3419856"/>
+            <a:ext cx="3108960" cy="603504"/>
+          </a:xfrm>
+          <a:prstGeom prst="rect">
+            <a:avLst/>
+          </a:prstGeom>
+          <a:noFill/>
+          <a:ln/>
+        </p:spPr>
+        <p:txBody>
+          <a:bodyPr wrap="square" rtlCol="0" anchor="t"/>
+          <a:lstStyle/>
+          <a:p>
+            <a:pPr indent="0" marL="0">
+              <a:buNone/>
+            </a:pPr>
+            <a:r>
+              <a:rPr lang="en-US" sz="1250" dirty="0">
+                <a:solidFill>
+                  <a:srgbClr val="12233B"/>
+                </a:solidFill>
+                <a:latin typeface="Calibri" pitchFamily="34" charset="0"/>
+                <a:ea typeface="Calibri" pitchFamily="34" charset="-122"/>
+                <a:cs typeface="Calibri" pitchFamily="34" charset="-120"/>
+              </a:rPr>
+              <a:t>organisations received the money beneath the US primes</a:t>
+            </a:r>
+            <a:endParaRPr lang="en-US" sz="1250" dirty="0"/>
+          </a:p>
+        </p:txBody>
+      </p:sp>
+      <p:sp>
+        <p:nvSpPr>
+          <p:cNvPr id="14" name="Shape 12"/>
+          <p:cNvSpPr/>
+          <p:nvPr/>
+        </p:nvSpPr>
+        <p:spPr>
+          <a:xfrm>
+            <a:off x="8046720" y="2468880"/>
+            <a:ext cx="3520440" cy="1691640"/>
+          </a:xfrm>
+          <a:prstGeom prst="roundRect">
+            <a:avLst>
+              <a:gd name="adj" fmla="val 4324"/>
+            </a:avLst>
+          </a:prstGeom>
+          <a:solidFill>
+            <a:srgbClr val="FFFFFF"/>
+          </a:solidFill>
+          <a:ln w="12700">
+            <a:solidFill>
+              <a:srgbClr val="DDE4EC"/>
+            </a:solidFill>
+            <a:prstDash val="solid"/>
+          </a:ln>
+          <a:effectLst>
+            <a:outerShdw sx="100000" sy="100000" kx="0" ky="0" algn="bl" rotWithShape="0" blurRad="114300" dist="25400" dir="5400000">
+              <a:srgbClr val="8895A7">
+                <a:alpha val="10000"/>
+              </a:srgbClr>
+            </a:outerShdw>
+          </a:effectLst>
+        </p:spPr>
+      </p:sp>
+      <p:sp>
+        <p:nvSpPr>
+          <p:cNvPr id="15" name="Shape 13"/>
+          <p:cNvSpPr/>
+          <p:nvPr/>
+        </p:nvSpPr>
+        <p:spPr>
+          <a:xfrm>
+            <a:off x="8046720" y="2761488"/>
+            <a:ext cx="64008" cy="1106424"/>
+          </a:xfrm>
+          <a:prstGeom prst="rect">
+            <a:avLst/>
+          </a:prstGeom>
+          <a:solidFill>
+            <a:srgbClr val="E08A00"/>
+          </a:solidFill>
+          <a:ln/>
+        </p:spPr>
+      </p:sp>
+      <p:sp>
+        <p:nvSpPr>
+          <p:cNvPr id="16" name="Text 14"/>
+          <p:cNvSpPr/>
+          <p:nvPr/>
+        </p:nvSpPr>
+        <p:spPr>
+          <a:xfrm>
+            <a:off x="8302752" y="2633472"/>
+            <a:ext cx="3063240" cy="868680"/>
+          </a:xfrm>
+          <a:prstGeom prst="rect">
+            <a:avLst/>
+          </a:prstGeom>
+          <a:noFill/>
+          <a:ln/>
+        </p:spPr>
+        <p:txBody>
+          <a:bodyPr wrap="square" rtlCol="0" anchor="ctr"/>
+          <a:lstStyle/>
+          <a:p>
+            <a:pPr indent="0" marL="0">
+              <a:buNone/>
+            </a:pPr>
+            <a:r>
+              <a:rPr lang="en-US" sz="3400" b="1" dirty="0">
                 <a:solidFill>
                   <a:srgbClr val="E08A00"/>
                 </a:solidFill>
@@ -5998,36 +7227,88 @@
                 <a:ea typeface="Georgia" pitchFamily="34" charset="-122"/>
                 <a:cs typeface="Georgia" pitchFamily="34" charset="-120"/>
               </a:rPr>
-              <a:t>Big promises, </a:t>
-            </a:r>
-            <a:pPr indent="0" marL="0">
-              <a:buNone/>
-            </a:pPr>
-            <a:r>
-              <a:rPr lang="en-US" sz="2600" b="1" dirty="0">
-                <a:solidFill>
-                  <a:srgbClr val="C0152F"/>
-                </a:solidFill>
-                <a:latin typeface="Georgia" pitchFamily="34" charset="0"/>
-                <a:ea typeface="Georgia" pitchFamily="34" charset="-122"/>
-                <a:cs typeface="Georgia" pitchFamily="34" charset="-120"/>
-              </a:rPr>
-              <a:t>small delivery</a:t>
-            </a:r>
-            <a:endParaRPr lang="en-US" sz="2600" dirty="0"/>
-          </a:p>
-        </p:txBody>
-      </p:sp>
-      <p:sp>
-        <p:nvSpPr>
-          <p:cNvPr id="12" name="Text 10"/>
-          <p:cNvSpPr/>
-          <p:nvPr/>
-        </p:nvSpPr>
-        <p:spPr>
-          <a:xfrm>
-            <a:off x="6537960" y="3749040"/>
-            <a:ext cx="4754880" cy="1737360"/>
+              <a:t>48 / 77</a:t>
+            </a:r>
+            <a:endParaRPr lang="en-US" sz="3400" dirty="0"/>
+          </a:p>
+        </p:txBody>
+      </p:sp>
+      <p:sp>
+        <p:nvSpPr>
+          <p:cNvPr id="17" name="Text 15"/>
+          <p:cNvSpPr/>
+          <p:nvPr/>
+        </p:nvSpPr>
+        <p:spPr>
+          <a:xfrm>
+            <a:off x="8302752" y="3419856"/>
+            <a:ext cx="3108960" cy="603504"/>
+          </a:xfrm>
+          <a:prstGeom prst="rect">
+            <a:avLst/>
+          </a:prstGeom>
+          <a:noFill/>
+          <a:ln/>
+        </p:spPr>
+        <p:txBody>
+          <a:bodyPr wrap="square" rtlCol="0" anchor="t"/>
+          <a:lstStyle/>
+          <a:p>
+            <a:pPr indent="0" marL="0">
+              <a:buNone/>
+            </a:pPr>
+            <a:r>
+              <a:rPr lang="en-US" sz="1250" dirty="0">
+                <a:solidFill>
+                  <a:srgbClr val="12233B"/>
+                </a:solidFill>
+                <a:latin typeface="Calibri" pitchFamily="34" charset="0"/>
+                <a:ea typeface="Calibri" pitchFamily="34" charset="-122"/>
+                <a:cs typeface="Calibri" pitchFamily="34" charset="-120"/>
+              </a:rPr>
+              <a:t>of Nepal's districts named as where the work happened</a:t>
+            </a:r>
+            <a:endParaRPr lang="en-US" sz="1250" dirty="0"/>
+          </a:p>
+        </p:txBody>
+      </p:sp>
+      <p:sp>
+        <p:nvSpPr>
+          <p:cNvPr id="18" name="Shape 16"/>
+          <p:cNvSpPr/>
+          <p:nvPr/>
+        </p:nvSpPr>
+        <p:spPr>
+          <a:xfrm>
+            <a:off x="640080" y="4526280"/>
+            <a:ext cx="10927080" cy="1417320"/>
+          </a:xfrm>
+          <a:prstGeom prst="roundRect">
+            <a:avLst>
+              <a:gd name="adj" fmla="val 5161"/>
+            </a:avLst>
+          </a:prstGeom>
+          <a:solidFill>
+            <a:srgbClr val="E9F4F3"/>
+          </a:solidFill>
+          <a:ln w="12700">
+            <a:solidFill>
+              <a:srgbClr val="BFD8D6"/>
+            </a:solidFill>
+            <a:prstDash val="solid"/>
+          </a:ln>
+        </p:spPr>
+      </p:sp>
+      <p:sp>
+        <p:nvSpPr>
+          <p:cNvPr id="19" name="Text 17"/>
+          <p:cNvSpPr/>
+          <p:nvPr/>
+        </p:nvSpPr>
+        <p:spPr>
+          <a:xfrm>
+            <a:off x="914400" y="4709160"/>
+            <a:ext cx="10332720" cy="1051560"/>
           </a:xfrm>
           <a:prstGeom prst="rect">
             <a:avLst/>
@@ -6046,15 +7327,32 @@
               <a:buNone/>
             </a:pPr>
             <a:r>
+              <a:rPr lang="en-US" sz="1400" b="1" dirty="0">
+                <a:solidFill>
+                  <a:srgbClr val="0E7C86"/>
+                </a:solidFill>
+                <a:latin typeface="Calibri" pitchFamily="34" charset="0"/>
+                <a:ea typeface="Calibri" pitchFamily="34" charset="-122"/>
+                <a:cs typeface="Calibri" pitchFamily="34" charset="-120"/>
+              </a:rPr>
+              <a:t>On the live dashboard:  </a:t>
+            </a:r>
+            <a:pPr indent="0" marL="0">
+              <a:lnSpc>
+                <a:spcPct val="105000"/>
+              </a:lnSpc>
+              <a:buNone/>
+            </a:pPr>
+            <a:r>
               <a:rPr lang="en-US" sz="1400" dirty="0">
                 <a:solidFill>
-                  <a:srgbClr val="5B6B7D"/>
-                </a:solidFill>
-                <a:latin typeface="Calibri" pitchFamily="34" charset="0"/>
-                <a:ea typeface="Calibri" pitchFamily="34" charset="-122"/>
-                <a:cs typeface="Calibri" pitchFamily="34" charset="-120"/>
-              </a:rPr>
-              <a:t>Chinese commitments to Nepal run to hundreds of millions; the disbursements Nepal actually records fell to about $14m by FY2022/23. The headline numbers are pledges, not cash. A measurement fact, stated neutrally.</a:t>
+                  <a:srgbClr val="12233B"/>
+                </a:solidFill>
+                <a:latin typeface="Calibri" pitchFamily="34" charset="0"/>
+                <a:ea typeface="Calibri" pitchFamily="34" charset="-122"/>
+                <a:cs typeface="Calibri" pitchFamily="34" charset="-120"/>
+              </a:rPr>
+              <a:t>click any district — Achham, Surkhet, Kailali — to see the named local NGOs that received US money there, and which international partner passed it down (organisations like Social Empowerment &amp; Building Accessibility Centre Nepal and Bahuuddeshiya Bikash Samaj).</a:t>
             </a:r>
             <a:endParaRPr lang="en-US" sz="1400" dirty="0"/>
           </a:p>
@@ -6062,7 +7360,7 @@
       </p:sp>
       <p:sp>
         <p:nvSpPr>
-          <p:cNvPr id="13" name="Text 11"/>
+          <p:cNvPr id="20" name="Text 18"/>
           <p:cNvSpPr/>
           <p:nvPr/>
         </p:nvSpPr>
@@ -6101,7 +7399,7 @@
       </p:sp>
       <p:sp>
         <p:nvSpPr>
-          <p:cNvPr id="14" name="Text 12"/>
+          <p:cNvPr id="21" name="Text 19"/>
           <p:cNvSpPr/>
           <p:nvPr/>
         </p:nvSpPr>
@@ -6152,7 +7450,7 @@
     <p:bg>
       <p:bgPr>
         <a:solidFill>
-          <a:srgbClr val="0D2440"/>
+          <a:srgbClr val="F4F6F9"/>
         </a:solidFill>
       </p:bgPr>
     </p:bg>
@@ -6198,7 +7496,7 @@
         </p:nvSpPr>
         <p:spPr>
           <a:xfrm>
-            <a:off x="548640" y="457200"/>
+            <a:off x="502920" y="384048"/>
             <a:ext cx="8229600" cy="365760"/>
           </a:xfrm>
           <a:prstGeom prst="rect">
@@ -6223,7 +7521,7 @@
                 <a:ea typeface="Calibri" pitchFamily="34" charset="-122"/>
                 <a:cs typeface="Calibri" pitchFamily="34" charset="-120"/>
               </a:rPr>
-              <a:t>HOW  </a:t>
+              <a:t>WHAT  </a:t>
             </a:r>
             <a:pPr indent="0" marL="0">
               <a:buNone/>
@@ -6237,7 +7535,7 @@
                 <a:ea typeface="Calibri" pitchFamily="34" charset="-122"/>
                 <a:cs typeface="Calibri" pitchFamily="34" charset="-120"/>
               </a:rPr>
-              <a:t>कसरी</a:t>
+              <a:t>के</a:t>
             </a:r>
             <a:endParaRPr lang="en-US" sz="1200" dirty="0"/>
           </a:p>
@@ -6251,8 +7549,8 @@
         </p:nvSpPr>
         <p:spPr>
           <a:xfrm>
-            <a:off x="502920" y="868680"/>
-            <a:ext cx="10972800" cy="914400"/>
+            <a:off x="475488" y="777240"/>
+            <a:ext cx="10789920" cy="914400"/>
           </a:xfrm>
           <a:prstGeom prst="rect">
             <a:avLst/>
@@ -6270,13 +7568,13 @@
             <a:r>
               <a:rPr lang="en-US" sz="3300" b="1" dirty="0">
                 <a:solidFill>
-                  <a:srgbClr val="FFFFFF"/>
+                  <a:srgbClr val="12233B"/>
                 </a:solidFill>
                 <a:latin typeface="Georgia" pitchFamily="34" charset="0"/>
                 <a:ea typeface="Georgia" pitchFamily="34" charset="-122"/>
                 <a:cs typeface="Georgia" pitchFamily="34" charset="-120"/>
               </a:rPr>
-              <a:t>Trust is built into the method</a:t>
+              <a:t>What the international statistics miss</a:t>
             </a:r>
             <a:endParaRPr lang="en-US" sz="3300" dirty="0"/>
           </a:p>
@@ -6290,20 +7588,20 @@
         </p:nvSpPr>
         <p:spPr>
           <a:xfrm>
-            <a:off x="640080" y="2148840"/>
-            <a:ext cx="5257800" cy="1143000"/>
+            <a:off x="640080" y="2103120"/>
+            <a:ext cx="5303520" cy="3657600"/>
           </a:xfrm>
           <a:prstGeom prst="roundRect">
             <a:avLst>
-              <a:gd name="adj" fmla="val 4800"/>
+              <a:gd name="adj" fmla="val 2000"/>
             </a:avLst>
           </a:prstGeom>
           <a:solidFill>
-            <a:srgbClr val="15315A"/>
+            <a:srgbClr val="FFFFFF"/>
           </a:solidFill>
           <a:ln w="12700">
             <a:solidFill>
-              <a:srgbClr val="24487A"/>
+              <a:srgbClr val="DDE4EC"/>
             </a:solidFill>
             <a:prstDash val="solid"/>
           </a:ln>
@@ -6317,34 +7615,34 @@
         </p:nvSpPr>
         <p:spPr>
           <a:xfrm>
-            <a:off x="822960" y="2313432"/>
-            <a:ext cx="502920" cy="502920"/>
-          </a:xfrm>
-          <a:prstGeom prst="rect">
-            <a:avLst/>
-          </a:prstGeom>
-          <a:noFill/>
-          <a:ln/>
-        </p:spPr>
-        <p:txBody>
-          <a:bodyPr wrap="square" rtlCol="0" anchor="ctr"/>
-          <a:lstStyle/>
-          <a:p>
-            <a:pPr algn="ctr" indent="0" marL="0">
-              <a:buNone/>
-            </a:pPr>
-            <a:r>
-              <a:rPr lang="en-US" sz="2200" b="1" dirty="0">
-                <a:solidFill>
-                  <a:srgbClr val="6FE3B8"/>
+            <a:off x="914400" y="2331720"/>
+            <a:ext cx="4572000" cy="457200"/>
+          </a:xfrm>
+          <a:prstGeom prst="rect">
+            <a:avLst/>
+          </a:prstGeom>
+          <a:noFill/>
+          <a:ln/>
+        </p:spPr>
+        <p:txBody>
+          <a:bodyPr wrap="square" rtlCol="0" anchor="ctr"/>
+          <a:lstStyle/>
+          <a:p>
+            <a:pPr indent="0" marL="0">
+              <a:buNone/>
+            </a:pPr>
+            <a:r>
+              <a:rPr lang="en-US" sz="2400" b="1" dirty="0">
+                <a:solidFill>
+                  <a:srgbClr val="0D2440"/>
                 </a:solidFill>
                 <a:latin typeface="Georgia" pitchFamily="34" charset="0"/>
                 <a:ea typeface="Georgia" pitchFamily="34" charset="-122"/>
                 <a:cs typeface="Georgia" pitchFamily="34" charset="-120"/>
               </a:rPr>
-              <a:t>✓</a:t>
-            </a:r>
-            <a:endParaRPr lang="en-US" sz="2200" dirty="0"/>
+              <a:t>India</a:t>
+            </a:r>
+            <a:endParaRPr lang="en-US" sz="2400" dirty="0"/>
           </a:p>
         </p:txBody>
       </p:sp>
@@ -6356,34 +7654,34 @@
         </p:nvSpPr>
         <p:spPr>
           <a:xfrm>
-            <a:off x="1417320" y="2295144"/>
-            <a:ext cx="4297680" cy="365760"/>
-          </a:xfrm>
-          <a:prstGeom prst="rect">
-            <a:avLst/>
-          </a:prstGeom>
-          <a:noFill/>
-          <a:ln/>
-        </p:spPr>
-        <p:txBody>
-          <a:bodyPr wrap="square" rtlCol="0" anchor="ctr"/>
-          <a:lstStyle/>
-          <a:p>
-            <a:pPr indent="0" marL="0">
-              <a:buNone/>
-            </a:pPr>
-            <a:r>
-              <a:rPr lang="en-US" sz="1500" b="1" dirty="0">
-                <a:solidFill>
-                  <a:srgbClr val="FFFFFF"/>
-                </a:solidFill>
-                <a:latin typeface="Calibri" pitchFamily="34" charset="0"/>
-                <a:ea typeface="Calibri" pitchFamily="34" charset="-122"/>
-                <a:cs typeface="Calibri" pitchFamily="34" charset="-120"/>
-              </a:rPr>
-              <a:t>Primary sources only</a:t>
-            </a:r>
-            <a:endParaRPr lang="en-US" sz="1500" dirty="0"/>
+            <a:off x="914400" y="2880360"/>
+            <a:ext cx="4572000" cy="731520"/>
+          </a:xfrm>
+          <a:prstGeom prst="rect">
+            <a:avLst/>
+          </a:prstGeom>
+          <a:noFill/>
+          <a:ln/>
+        </p:spPr>
+        <p:txBody>
+          <a:bodyPr wrap="square" rtlCol="0" anchor="ctr"/>
+          <a:lstStyle/>
+          <a:p>
+            <a:pPr indent="0" marL="0">
+              <a:buNone/>
+            </a:pPr>
+            <a:r>
+              <a:rPr lang="en-US" sz="4000" b="1" dirty="0">
+                <a:solidFill>
+                  <a:srgbClr val="0E7C86"/>
+                </a:solidFill>
+                <a:latin typeface="Georgia" pitchFamily="34" charset="0"/>
+                <a:ea typeface="Georgia" pitchFamily="34" charset="-122"/>
+                <a:cs typeface="Georgia" pitchFamily="34" charset="-120"/>
+              </a:rPr>
+              <a:t>$99.8m</a:t>
+            </a:r>
+            <a:endParaRPr lang="en-US" sz="4000" dirty="0"/>
           </a:p>
         </p:txBody>
       </p:sp>
@@ -6395,34 +7693,37 @@
         </p:nvSpPr>
         <p:spPr>
           <a:xfrm>
-            <a:off x="1417320" y="2651760"/>
-            <a:ext cx="4343400" cy="566928"/>
-          </a:xfrm>
-          <a:prstGeom prst="rect">
-            <a:avLst/>
-          </a:prstGeom>
-          <a:noFill/>
-          <a:ln/>
-        </p:spPr>
-        <p:txBody>
-          <a:bodyPr wrap="square" rtlCol="0" anchor="ctr"/>
-          <a:lstStyle/>
-          <a:p>
-            <a:pPr indent="0" marL="0">
-              <a:buNone/>
-            </a:pPr>
-            <a:r>
-              <a:rPr lang="en-US" sz="1150" dirty="0">
-                <a:solidFill>
-                  <a:srgbClr val="CADCFC"/>
-                </a:solidFill>
-                <a:latin typeface="Calibri" pitchFamily="34" charset="0"/>
-                <a:ea typeface="Calibri" pitchFamily="34" charset="-122"/>
-                <a:cs typeface="Calibri" pitchFamily="34" charset="-120"/>
-              </a:rPr>
-              <a:t>Government and multilateral systems directly — no aggregators, no guesses.</a:t>
-            </a:r>
-            <a:endParaRPr lang="en-US" sz="1150" dirty="0"/>
+            <a:off x="914400" y="3749040"/>
+            <a:ext cx="4754880" cy="1737360"/>
+          </a:xfrm>
+          <a:prstGeom prst="rect">
+            <a:avLst/>
+          </a:prstGeom>
+          <a:noFill/>
+          <a:ln/>
+        </p:spPr>
+        <p:txBody>
+          <a:bodyPr wrap="square" rtlCol="0" anchor="ctr"/>
+          <a:lstStyle/>
+          <a:p>
+            <a:pPr indent="0" marL="0">
+              <a:lnSpc>
+                <a:spcPct val="105000"/>
+              </a:lnSpc>
+              <a:buNone/>
+            </a:pPr>
+            <a:r>
+              <a:rPr lang="en-US" sz="1400" dirty="0">
+                <a:solidFill>
+                  <a:srgbClr val="5B6B7D"/>
+                </a:solidFill>
+                <a:latin typeface="Calibri" pitchFamily="34" charset="0"/>
+                <a:ea typeface="Calibri" pitchFamily="34" charset="-122"/>
+                <a:cs typeface="Calibri" pitchFamily="34" charset="-120"/>
+              </a:rPr>
+              <a:t>Nepal's largest bilateral donor in FY2022/23 — and almost invisible in OECD data, because India does not report to it. Only Nepal's own books capture it.</a:t>
+            </a:r>
+            <a:endParaRPr lang="en-US" sz="1400" dirty="0"/>
           </a:p>
         </p:txBody>
       </p:sp>
@@ -6434,20 +7735,20 @@
         </p:nvSpPr>
         <p:spPr>
           <a:xfrm>
-            <a:off x="6172200" y="2148840"/>
-            <a:ext cx="5257800" cy="1143000"/>
+            <a:off x="6263640" y="2103120"/>
+            <a:ext cx="5257800" cy="3657600"/>
           </a:xfrm>
           <a:prstGeom prst="roundRect">
             <a:avLst>
-              <a:gd name="adj" fmla="val 4800"/>
+              <a:gd name="adj" fmla="val 2000"/>
             </a:avLst>
           </a:prstGeom>
           <a:solidFill>
-            <a:srgbClr val="15315A"/>
+            <a:srgbClr val="FFFFFF"/>
           </a:solidFill>
           <a:ln w="12700">
             <a:solidFill>
-              <a:srgbClr val="24487A"/>
+              <a:srgbClr val="DDE4EC"/>
             </a:solidFill>
             <a:prstDash val="solid"/>
           </a:ln>
@@ -6461,34 +7762,34 @@
         </p:nvSpPr>
         <p:spPr>
           <a:xfrm>
-            <a:off x="6355080" y="2313432"/>
-            <a:ext cx="502920" cy="502920"/>
-          </a:xfrm>
-          <a:prstGeom prst="rect">
-            <a:avLst/>
-          </a:prstGeom>
-          <a:noFill/>
-          <a:ln/>
-        </p:spPr>
-        <p:txBody>
-          <a:bodyPr wrap="square" rtlCol="0" anchor="ctr"/>
-          <a:lstStyle/>
-          <a:p>
-            <a:pPr algn="ctr" indent="0" marL="0">
-              <a:buNone/>
-            </a:pPr>
-            <a:r>
-              <a:rPr lang="en-US" sz="2200" b="1" dirty="0">
-                <a:solidFill>
-                  <a:srgbClr val="6FE3B8"/>
+            <a:off x="6537960" y="2331720"/>
+            <a:ext cx="4572000" cy="457200"/>
+          </a:xfrm>
+          <a:prstGeom prst="rect">
+            <a:avLst/>
+          </a:prstGeom>
+          <a:noFill/>
+          <a:ln/>
+        </p:spPr>
+        <p:txBody>
+          <a:bodyPr wrap="square" rtlCol="0" anchor="ctr"/>
+          <a:lstStyle/>
+          <a:p>
+            <a:pPr indent="0" marL="0">
+              <a:buNone/>
+            </a:pPr>
+            <a:r>
+              <a:rPr lang="en-US" sz="2400" b="1" dirty="0">
+                <a:solidFill>
+                  <a:srgbClr val="0D2440"/>
                 </a:solidFill>
                 <a:latin typeface="Georgia" pitchFamily="34" charset="0"/>
                 <a:ea typeface="Georgia" pitchFamily="34" charset="-122"/>
                 <a:cs typeface="Georgia" pitchFamily="34" charset="-120"/>
               </a:rPr>
-              <a:t>✓</a:t>
-            </a:r>
-            <a:endParaRPr lang="en-US" sz="2200" dirty="0"/>
+              <a:t>China</a:t>
+            </a:r>
+            <a:endParaRPr lang="en-US" sz="2400" dirty="0"/>
           </a:p>
         </p:txBody>
       </p:sp>
@@ -6500,688 +7801,168 @@
         </p:nvSpPr>
         <p:spPr>
           <a:xfrm>
-            <a:off x="6949440" y="2295144"/>
-            <a:ext cx="4297680" cy="365760"/>
-          </a:xfrm>
-          <a:prstGeom prst="rect">
-            <a:avLst/>
-          </a:prstGeom>
-          <a:noFill/>
-          <a:ln/>
-        </p:spPr>
-        <p:txBody>
-          <a:bodyPr wrap="square" rtlCol="0" anchor="ctr"/>
-          <a:lstStyle/>
-          <a:p>
-            <a:pPr indent="0" marL="0">
-              <a:buNone/>
-            </a:pPr>
-            <a:r>
-              <a:rPr lang="en-US" sz="1500" b="1" dirty="0">
-                <a:solidFill>
-                  <a:srgbClr val="FFFFFF"/>
-                </a:solidFill>
-                <a:latin typeface="Calibri" pitchFamily="34" charset="0"/>
-                <a:ea typeface="Calibri" pitchFamily="34" charset="-122"/>
-                <a:cs typeface="Calibri" pitchFamily="34" charset="-120"/>
-              </a:rPr>
-              <a:t>Archived with a fingerprint</a:t>
-            </a:r>
-            <a:endParaRPr lang="en-US" sz="1500" dirty="0"/>
-          </a:p>
-        </p:txBody>
-      </p:sp>
-      <p:sp>
-        <p:nvSpPr>
-          <p:cNvPr id="12" name="Text 10"/>
-          <p:cNvSpPr/>
-          <p:nvPr/>
-        </p:nvSpPr>
-        <p:spPr>
-          <a:xfrm>
-            <a:off x="6949440" y="2651760"/>
-            <a:ext cx="4343400" cy="566928"/>
-          </a:xfrm>
-          <a:prstGeom prst="rect">
-            <a:avLst/>
-          </a:prstGeom>
-          <a:noFill/>
-          <a:ln/>
-        </p:spPr>
-        <p:txBody>
-          <a:bodyPr wrap="square" rtlCol="0" anchor="ctr"/>
-          <a:lstStyle/>
-          <a:p>
-            <a:pPr indent="0" marL="0">
-              <a:buNone/>
-            </a:pPr>
-            <a:r>
-              <a:rPr lang="en-US" sz="1150" dirty="0">
-                <a:solidFill>
-                  <a:srgbClr val="CADCFC"/>
-                </a:solidFill>
-                <a:latin typeface="Calibri" pitchFamily="34" charset="0"/>
-                <a:ea typeface="Calibri" pitchFamily="34" charset="-122"/>
-                <a:cs typeface="Calibri" pitchFamily="34" charset="-120"/>
-              </a:rPr>
-              <a:t>Every figure is pinned to a dated snapshot and a SHA-256 checksum.</a:t>
-            </a:r>
-            <a:endParaRPr lang="en-US" sz="1150" dirty="0"/>
-          </a:p>
-        </p:txBody>
-      </p:sp>
-      <p:sp>
-        <p:nvSpPr>
-          <p:cNvPr id="13" name="Shape 11"/>
-          <p:cNvSpPr/>
-          <p:nvPr/>
-        </p:nvSpPr>
-        <p:spPr>
-          <a:xfrm>
-            <a:off x="640080" y="3474720"/>
-            <a:ext cx="5257800" cy="1143000"/>
-          </a:xfrm>
-          <a:prstGeom prst="roundRect">
-            <a:avLst>
-              <a:gd name="adj" fmla="val 4800"/>
-            </a:avLst>
-          </a:prstGeom>
-          <a:solidFill>
-            <a:srgbClr val="15315A"/>
-          </a:solidFill>
-          <a:ln w="12700">
-            <a:solidFill>
-              <a:srgbClr val="24487A"/>
-            </a:solidFill>
-            <a:prstDash val="solid"/>
-          </a:ln>
-        </p:spPr>
-      </p:sp>
-      <p:sp>
-        <p:nvSpPr>
-          <p:cNvPr id="14" name="Text 12"/>
-          <p:cNvSpPr/>
-          <p:nvPr/>
-        </p:nvSpPr>
-        <p:spPr>
-          <a:xfrm>
-            <a:off x="822960" y="3639312"/>
-            <a:ext cx="502920" cy="502920"/>
-          </a:xfrm>
-          <a:prstGeom prst="rect">
-            <a:avLst/>
-          </a:prstGeom>
-          <a:noFill/>
-          <a:ln/>
-        </p:spPr>
-        <p:txBody>
-          <a:bodyPr wrap="square" rtlCol="0" anchor="ctr"/>
-          <a:lstStyle/>
-          <a:p>
-            <a:pPr algn="ctr" indent="0" marL="0">
-              <a:buNone/>
-            </a:pPr>
-            <a:r>
-              <a:rPr lang="en-US" sz="2200" b="1" dirty="0">
-                <a:solidFill>
-                  <a:srgbClr val="6FE3B8"/>
+            <a:off x="6537960" y="2926080"/>
+            <a:ext cx="4846320" cy="640080"/>
+          </a:xfrm>
+          <a:prstGeom prst="rect">
+            <a:avLst/>
+          </a:prstGeom>
+          <a:noFill/>
+          <a:ln/>
+        </p:spPr>
+        <p:txBody>
+          <a:bodyPr wrap="square" rtlCol="0" anchor="ctr"/>
+          <a:lstStyle/>
+          <a:p>
+            <a:pPr indent="0" marL="0">
+              <a:buNone/>
+            </a:pPr>
+            <a:r>
+              <a:rPr lang="en-US" sz="2600" b="1" dirty="0">
+                <a:solidFill>
+                  <a:srgbClr val="E08A00"/>
                 </a:solidFill>
                 <a:latin typeface="Georgia" pitchFamily="34" charset="0"/>
                 <a:ea typeface="Georgia" pitchFamily="34" charset="-122"/>
                 <a:cs typeface="Georgia" pitchFamily="34" charset="-120"/>
               </a:rPr>
-              <a:t>✓</a:t>
-            </a:r>
-            <a:endParaRPr lang="en-US" sz="2200" dirty="0"/>
-          </a:p>
-        </p:txBody>
-      </p:sp>
-      <p:sp>
-        <p:nvSpPr>
-          <p:cNvPr id="15" name="Text 13"/>
-          <p:cNvSpPr/>
-          <p:nvPr/>
-        </p:nvSpPr>
-        <p:spPr>
-          <a:xfrm>
-            <a:off x="1417320" y="3621024"/>
-            <a:ext cx="4297680" cy="365760"/>
-          </a:xfrm>
-          <a:prstGeom prst="rect">
-            <a:avLst/>
-          </a:prstGeom>
-          <a:noFill/>
-          <a:ln/>
-        </p:spPr>
-        <p:txBody>
-          <a:bodyPr wrap="square" rtlCol="0" anchor="ctr"/>
-          <a:lstStyle/>
-          <a:p>
-            <a:pPr indent="0" marL="0">
-              <a:buNone/>
-            </a:pPr>
-            <a:r>
-              <a:rPr lang="en-US" sz="1500" b="1" dirty="0">
-                <a:solidFill>
-                  <a:srgbClr val="FFFFFF"/>
-                </a:solidFill>
-                <a:latin typeface="Calibri" pitchFamily="34" charset="0"/>
-                <a:ea typeface="Calibri" pitchFamily="34" charset="-122"/>
-                <a:cs typeface="Calibri" pitchFamily="34" charset="-120"/>
-              </a:rPr>
-              <a:t>Reconciled, not merged</a:t>
-            </a:r>
-            <a:endParaRPr lang="en-US" sz="1500" dirty="0"/>
-          </a:p>
-        </p:txBody>
-      </p:sp>
-      <p:sp>
-        <p:nvSpPr>
-          <p:cNvPr id="16" name="Text 14"/>
-          <p:cNvSpPr/>
-          <p:nvPr/>
-        </p:nvSpPr>
-        <p:spPr>
-          <a:xfrm>
-            <a:off x="1417320" y="3977640"/>
-            <a:ext cx="4343400" cy="566928"/>
-          </a:xfrm>
-          <a:prstGeom prst="rect">
-            <a:avLst/>
-          </a:prstGeom>
-          <a:noFill/>
-          <a:ln/>
-        </p:spPr>
-        <p:txBody>
-          <a:bodyPr wrap="square" rtlCol="0" anchor="ctr"/>
-          <a:lstStyle/>
-          <a:p>
-            <a:pPr indent="0" marL="0">
-              <a:buNone/>
-            </a:pPr>
-            <a:r>
-              <a:rPr lang="en-US" sz="1150" dirty="0">
-                <a:solidFill>
-                  <a:srgbClr val="CADCFC"/>
-                </a:solidFill>
-                <a:latin typeface="Calibri" pitchFamily="34" charset="0"/>
-                <a:ea typeface="Calibri" pitchFamily="34" charset="-122"/>
-                <a:cs typeface="Calibri" pitchFamily="34" charset="-120"/>
-              </a:rPr>
-              <a:t>The two ledgers are squared against each other; every mismatch is logged with its cause.</a:t>
-            </a:r>
-            <a:endParaRPr lang="en-US" sz="1150" dirty="0"/>
-          </a:p>
-        </p:txBody>
-      </p:sp>
-      <p:sp>
-        <p:nvSpPr>
-          <p:cNvPr id="17" name="Shape 15"/>
-          <p:cNvSpPr/>
-          <p:nvPr/>
-        </p:nvSpPr>
-        <p:spPr>
-          <a:xfrm>
-            <a:off x="6172200" y="3474720"/>
-            <a:ext cx="5257800" cy="1143000"/>
-          </a:xfrm>
-          <a:prstGeom prst="roundRect">
-            <a:avLst>
-              <a:gd name="adj" fmla="val 4800"/>
-            </a:avLst>
-          </a:prstGeom>
-          <a:solidFill>
-            <a:srgbClr val="15315A"/>
-          </a:solidFill>
-          <a:ln w="12700">
-            <a:solidFill>
-              <a:srgbClr val="24487A"/>
-            </a:solidFill>
-            <a:prstDash val="solid"/>
-          </a:ln>
-        </p:spPr>
-      </p:sp>
-      <p:sp>
-        <p:nvSpPr>
-          <p:cNvPr id="18" name="Text 16"/>
-          <p:cNvSpPr/>
-          <p:nvPr/>
-        </p:nvSpPr>
-        <p:spPr>
-          <a:xfrm>
-            <a:off x="6355080" y="3639312"/>
-            <a:ext cx="502920" cy="502920"/>
-          </a:xfrm>
-          <a:prstGeom prst="rect">
-            <a:avLst/>
-          </a:prstGeom>
-          <a:noFill/>
-          <a:ln/>
-        </p:spPr>
-        <p:txBody>
-          <a:bodyPr wrap="square" rtlCol="0" anchor="ctr"/>
-          <a:lstStyle/>
-          <a:p>
-            <a:pPr algn="ctr" indent="0" marL="0">
-              <a:buNone/>
-            </a:pPr>
-            <a:r>
-              <a:rPr lang="en-US" sz="2200" b="1" dirty="0">
-                <a:solidFill>
-                  <a:srgbClr val="6FE3B8"/>
+              <a:t>Big promises, </a:t>
+            </a:r>
+            <a:pPr indent="0" marL="0">
+              <a:buNone/>
+            </a:pPr>
+            <a:r>
+              <a:rPr lang="en-US" sz="2600" b="1" dirty="0">
+                <a:solidFill>
+                  <a:srgbClr val="C0152F"/>
                 </a:solidFill>
                 <a:latin typeface="Georgia" pitchFamily="34" charset="0"/>
                 <a:ea typeface="Georgia" pitchFamily="34" charset="-122"/>
                 <a:cs typeface="Georgia" pitchFamily="34" charset="-120"/>
               </a:rPr>
-              <a:t>✓</a:t>
-            </a:r>
-            <a:endParaRPr lang="en-US" sz="2200" dirty="0"/>
-          </a:p>
-        </p:txBody>
-      </p:sp>
-      <p:sp>
-        <p:nvSpPr>
-          <p:cNvPr id="19" name="Text 17"/>
-          <p:cNvSpPr/>
-          <p:nvPr/>
-        </p:nvSpPr>
-        <p:spPr>
-          <a:xfrm>
-            <a:off x="6949440" y="3621024"/>
-            <a:ext cx="4297680" cy="365760"/>
-          </a:xfrm>
-          <a:prstGeom prst="rect">
-            <a:avLst/>
-          </a:prstGeom>
-          <a:noFill/>
-          <a:ln/>
-        </p:spPr>
-        <p:txBody>
-          <a:bodyPr wrap="square" rtlCol="0" anchor="ctr"/>
-          <a:lstStyle/>
-          <a:p>
-            <a:pPr indent="0" marL="0">
-              <a:buNone/>
-            </a:pPr>
-            <a:r>
-              <a:rPr lang="en-US" sz="1500" b="1" dirty="0">
-                <a:solidFill>
-                  <a:srgbClr val="FFFFFF"/>
-                </a:solidFill>
-                <a:latin typeface="Calibri" pitchFamily="34" charset="0"/>
-                <a:ea typeface="Calibri" pitchFamily="34" charset="-122"/>
-                <a:cs typeface="Calibri" pitchFamily="34" charset="-120"/>
-              </a:rPr>
-              <a:t>Never fabricated</a:t>
-            </a:r>
-            <a:endParaRPr lang="en-US" sz="1500" dirty="0"/>
-          </a:p>
-        </p:txBody>
-      </p:sp>
-      <p:sp>
-        <p:nvSpPr>
-          <p:cNvPr id="20" name="Text 18"/>
-          <p:cNvSpPr/>
-          <p:nvPr/>
-        </p:nvSpPr>
-        <p:spPr>
-          <a:xfrm>
-            <a:off x="6949440" y="3977640"/>
-            <a:ext cx="4343400" cy="566928"/>
-          </a:xfrm>
-          <a:prstGeom prst="rect">
-            <a:avLst/>
-          </a:prstGeom>
-          <a:noFill/>
-          <a:ln/>
-        </p:spPr>
-        <p:txBody>
-          <a:bodyPr wrap="square" rtlCol="0" anchor="ctr"/>
-          <a:lstStyle/>
-          <a:p>
-            <a:pPr indent="0" marL="0">
-              <a:buNone/>
-            </a:pPr>
-            <a:r>
-              <a:rPr lang="en-US" sz="1150" dirty="0">
-                <a:solidFill>
-                  <a:srgbClr val="CADCFC"/>
-                </a:solidFill>
-                <a:latin typeface="Calibri" pitchFamily="34" charset="0"/>
-                <a:ea typeface="Calibri" pitchFamily="34" charset="-122"/>
-                <a:cs typeface="Calibri" pitchFamily="34" charset="-120"/>
-              </a:rPr>
-              <a:t>What cannot be verified is left blank and labelled missing.</a:t>
-            </a:r>
-            <a:endParaRPr lang="en-US" sz="1150" dirty="0"/>
-          </a:p>
-        </p:txBody>
-      </p:sp>
-      <p:sp>
-        <p:nvSpPr>
-          <p:cNvPr id="21" name="Shape 19"/>
-          <p:cNvSpPr/>
-          <p:nvPr/>
-        </p:nvSpPr>
-        <p:spPr>
-          <a:xfrm>
-            <a:off x="640080" y="4800600"/>
-            <a:ext cx="5257800" cy="1143000"/>
-          </a:xfrm>
-          <a:prstGeom prst="roundRect">
-            <a:avLst>
-              <a:gd name="adj" fmla="val 4800"/>
-            </a:avLst>
-          </a:prstGeom>
-          <a:solidFill>
-            <a:srgbClr val="15315A"/>
-          </a:solidFill>
-          <a:ln w="12700">
-            <a:solidFill>
-              <a:srgbClr val="24487A"/>
-            </a:solidFill>
-            <a:prstDash val="solid"/>
-          </a:ln>
-        </p:spPr>
-      </p:sp>
-      <p:sp>
-        <p:nvSpPr>
-          <p:cNvPr id="22" name="Text 20"/>
-          <p:cNvSpPr/>
-          <p:nvPr/>
-        </p:nvSpPr>
-        <p:spPr>
-          <a:xfrm>
-            <a:off x="822960" y="4965192"/>
-            <a:ext cx="502920" cy="502920"/>
-          </a:xfrm>
-          <a:prstGeom prst="rect">
-            <a:avLst/>
-          </a:prstGeom>
-          <a:noFill/>
-          <a:ln/>
-        </p:spPr>
-        <p:txBody>
-          <a:bodyPr wrap="square" rtlCol="0" anchor="ctr"/>
-          <a:lstStyle/>
-          <a:p>
-            <a:pPr algn="ctr" indent="0" marL="0">
-              <a:buNone/>
-            </a:pPr>
-            <a:r>
-              <a:rPr lang="en-US" sz="2200" b="1" dirty="0">
-                <a:solidFill>
-                  <a:srgbClr val="6FE3B8"/>
-                </a:solidFill>
-                <a:latin typeface="Georgia" pitchFamily="34" charset="0"/>
-                <a:ea typeface="Georgia" pitchFamily="34" charset="-122"/>
-                <a:cs typeface="Georgia" pitchFamily="34" charset="-120"/>
-              </a:rPr>
-              <a:t>✓</a:t>
-            </a:r>
-            <a:endParaRPr lang="en-US" sz="2200" dirty="0"/>
-          </a:p>
-        </p:txBody>
-      </p:sp>
-      <p:sp>
-        <p:nvSpPr>
-          <p:cNvPr id="23" name="Text 21"/>
-          <p:cNvSpPr/>
-          <p:nvPr/>
-        </p:nvSpPr>
-        <p:spPr>
-          <a:xfrm>
-            <a:off x="1417320" y="4946904"/>
-            <a:ext cx="4297680" cy="365760"/>
-          </a:xfrm>
-          <a:prstGeom prst="rect">
-            <a:avLst/>
-          </a:prstGeom>
-          <a:noFill/>
-          <a:ln/>
-        </p:spPr>
-        <p:txBody>
-          <a:bodyPr wrap="square" rtlCol="0" anchor="ctr"/>
-          <a:lstStyle/>
-          <a:p>
-            <a:pPr indent="0" marL="0">
-              <a:buNone/>
-            </a:pPr>
-            <a:r>
-              <a:rPr lang="en-US" sz="1500" b="1" dirty="0">
-                <a:solidFill>
-                  <a:srgbClr val="FFFFFF"/>
-                </a:solidFill>
-                <a:latin typeface="Calibri" pitchFamily="34" charset="0"/>
-                <a:ea typeface="Calibri" pitchFamily="34" charset="-122"/>
-                <a:cs typeface="Calibri" pitchFamily="34" charset="-120"/>
-              </a:rPr>
-              <a:t>Honest about limits</a:t>
-            </a:r>
-            <a:endParaRPr lang="en-US" sz="1500" dirty="0"/>
-          </a:p>
-        </p:txBody>
-      </p:sp>
-      <p:sp>
-        <p:nvSpPr>
-          <p:cNvPr id="24" name="Text 22"/>
-          <p:cNvSpPr/>
-          <p:nvPr/>
-        </p:nvSpPr>
-        <p:spPr>
-          <a:xfrm>
-            <a:off x="1417320" y="5303520"/>
-            <a:ext cx="4343400" cy="566928"/>
-          </a:xfrm>
-          <a:prstGeom prst="rect">
-            <a:avLst/>
-          </a:prstGeom>
-          <a:noFill/>
-          <a:ln/>
-        </p:spPr>
-        <p:txBody>
-          <a:bodyPr wrap="square" rtlCol="0" anchor="ctr"/>
-          <a:lstStyle/>
-          <a:p>
-            <a:pPr indent="0" marL="0">
-              <a:buNone/>
-            </a:pPr>
-            <a:r>
-              <a:rPr lang="en-US" sz="1150" dirty="0">
-                <a:solidFill>
-                  <a:srgbClr val="CADCFC"/>
-                </a:solidFill>
-                <a:latin typeface="Calibri" pitchFamily="34" charset="0"/>
-                <a:ea typeface="Calibri" pitchFamily="34" charset="-122"/>
-                <a:cs typeface="Calibri" pitchFamily="34" charset="-120"/>
-              </a:rPr>
-              <a:t>Redactions, classifications and uncertainty are flagged on every chart.</a:t>
-            </a:r>
-            <a:endParaRPr lang="en-US" sz="1150" dirty="0"/>
-          </a:p>
-        </p:txBody>
-      </p:sp>
-      <p:sp>
-        <p:nvSpPr>
-          <p:cNvPr id="25" name="Shape 23"/>
-          <p:cNvSpPr/>
-          <p:nvPr/>
-        </p:nvSpPr>
-        <p:spPr>
-          <a:xfrm>
-            <a:off x="6172200" y="4800600"/>
-            <a:ext cx="5257800" cy="1143000"/>
-          </a:xfrm>
-          <a:prstGeom prst="roundRect">
-            <a:avLst>
-              <a:gd name="adj" fmla="val 4800"/>
-            </a:avLst>
-          </a:prstGeom>
-          <a:solidFill>
-            <a:srgbClr val="15315A"/>
-          </a:solidFill>
-          <a:ln w="12700">
-            <a:solidFill>
-              <a:srgbClr val="24487A"/>
-            </a:solidFill>
-            <a:prstDash val="solid"/>
-          </a:ln>
-        </p:spPr>
-      </p:sp>
-      <p:sp>
-        <p:nvSpPr>
-          <p:cNvPr id="26" name="Text 24"/>
-          <p:cNvSpPr/>
-          <p:nvPr/>
-        </p:nvSpPr>
-        <p:spPr>
-          <a:xfrm>
-            <a:off x="6355080" y="4965192"/>
-            <a:ext cx="502920" cy="502920"/>
-          </a:xfrm>
-          <a:prstGeom prst="rect">
-            <a:avLst/>
-          </a:prstGeom>
-          <a:noFill/>
-          <a:ln/>
-        </p:spPr>
-        <p:txBody>
-          <a:bodyPr wrap="square" rtlCol="0" anchor="ctr"/>
-          <a:lstStyle/>
-          <a:p>
-            <a:pPr algn="ctr" indent="0" marL="0">
-              <a:buNone/>
-            </a:pPr>
-            <a:r>
-              <a:rPr lang="en-US" sz="2200" b="1" dirty="0">
-                <a:solidFill>
-                  <a:srgbClr val="6FE3B8"/>
-                </a:solidFill>
-                <a:latin typeface="Georgia" pitchFamily="34" charset="0"/>
-                <a:ea typeface="Georgia" pitchFamily="34" charset="-122"/>
-                <a:cs typeface="Georgia" pitchFamily="34" charset="-120"/>
-              </a:rPr>
-              <a:t>✓</a:t>
-            </a:r>
-            <a:endParaRPr lang="en-US" sz="2200" dirty="0"/>
-          </a:p>
-        </p:txBody>
-      </p:sp>
-      <p:sp>
-        <p:nvSpPr>
-          <p:cNvPr id="27" name="Text 25"/>
-          <p:cNvSpPr/>
-          <p:nvPr/>
-        </p:nvSpPr>
-        <p:spPr>
-          <a:xfrm>
-            <a:off x="6949440" y="4946904"/>
-            <a:ext cx="4297680" cy="365760"/>
-          </a:xfrm>
-          <a:prstGeom prst="rect">
-            <a:avLst/>
-          </a:prstGeom>
-          <a:noFill/>
-          <a:ln/>
-        </p:spPr>
-        <p:txBody>
-          <a:bodyPr wrap="square" rtlCol="0" anchor="ctr"/>
-          <a:lstStyle/>
-          <a:p>
-            <a:pPr indent="0" marL="0">
-              <a:buNone/>
-            </a:pPr>
-            <a:r>
-              <a:rPr lang="en-US" sz="1500" b="1" dirty="0">
-                <a:solidFill>
-                  <a:srgbClr val="FFFFFF"/>
-                </a:solidFill>
-                <a:latin typeface="Calibri" pitchFamily="34" charset="0"/>
-                <a:ea typeface="Calibri" pitchFamily="34" charset="-122"/>
-                <a:cs typeface="Calibri" pitchFamily="34" charset="-120"/>
-              </a:rPr>
-              <a:t>Fully reproducible</a:t>
-            </a:r>
-            <a:endParaRPr lang="en-US" sz="1500" dirty="0"/>
-          </a:p>
-        </p:txBody>
-      </p:sp>
-      <p:sp>
-        <p:nvSpPr>
-          <p:cNvPr id="28" name="Text 26"/>
-          <p:cNvSpPr/>
-          <p:nvPr/>
-        </p:nvSpPr>
-        <p:spPr>
-          <a:xfrm>
-            <a:off x="6949440" y="5303520"/>
-            <a:ext cx="4343400" cy="566928"/>
-          </a:xfrm>
-          <a:prstGeom prst="rect">
-            <a:avLst/>
-          </a:prstGeom>
-          <a:noFill/>
-          <a:ln/>
-        </p:spPr>
-        <p:txBody>
-          <a:bodyPr wrap="square" rtlCol="0" anchor="ctr"/>
-          <a:lstStyle/>
-          <a:p>
-            <a:pPr indent="0" marL="0">
-              <a:buNone/>
-            </a:pPr>
-            <a:r>
-              <a:rPr lang="en-US" sz="1150" dirty="0">
-                <a:solidFill>
-                  <a:srgbClr val="CADCFC"/>
-                </a:solidFill>
-                <a:latin typeface="Calibri" pitchFamily="34" charset="0"/>
-                <a:ea typeface="Calibri" pitchFamily="34" charset="-122"/>
-                <a:cs typeface="Calibri" pitchFamily="34" charset="-120"/>
-              </a:rPr>
-              <a:t>Anyone can re-run the pipeline and get the same numbers.</a:t>
-            </a:r>
-            <a:endParaRPr lang="en-US" sz="1150" dirty="0"/>
-          </a:p>
-        </p:txBody>
-      </p:sp>
-      <p:sp>
-        <p:nvSpPr>
-          <p:cNvPr id="29" name="Text 27"/>
-          <p:cNvSpPr/>
-          <p:nvPr/>
-        </p:nvSpPr>
-        <p:spPr>
-          <a:xfrm>
-            <a:off x="640080" y="6355080"/>
-            <a:ext cx="10058400" cy="274320"/>
-          </a:xfrm>
-          <a:prstGeom prst="rect">
-            <a:avLst/>
-          </a:prstGeom>
-          <a:noFill/>
-          <a:ln/>
-        </p:spPr>
-        <p:txBody>
-          <a:bodyPr wrap="square" rtlCol="0" anchor="ctr"/>
-          <a:lstStyle/>
-          <a:p>
-            <a:pPr indent="0" marL="0">
-              <a:buNone/>
-            </a:pPr>
-            <a:r>
-              <a:rPr lang="en-US" sz="1100" i="1" dirty="0">
-                <a:solidFill>
-                  <a:srgbClr val="8FA6C4"/>
-                </a:solidFill>
-                <a:latin typeface="Calibri" pitchFamily="34" charset="0"/>
-                <a:ea typeface="Calibri" pitchFamily="34" charset="-122"/>
-                <a:cs typeface="Calibri" pitchFamily="34" charset="-120"/>
-              </a:rPr>
-              <a:t>9 sources · all reconciling to the dollar where they overlap</a:t>
-            </a:r>
-            <a:endParaRPr lang="en-US" sz="1100" dirty="0"/>
+              <a:t>small delivery</a:t>
+            </a:r>
+            <a:endParaRPr lang="en-US" sz="2600" dirty="0"/>
+          </a:p>
+        </p:txBody>
+      </p:sp>
+      <p:sp>
+        <p:nvSpPr>
+          <p:cNvPr id="12" name="Text 10"/>
+          <p:cNvSpPr/>
+          <p:nvPr/>
+        </p:nvSpPr>
+        <p:spPr>
+          <a:xfrm>
+            <a:off x="6537960" y="3749040"/>
+            <a:ext cx="4754880" cy="1737360"/>
+          </a:xfrm>
+          <a:prstGeom prst="rect">
+            <a:avLst/>
+          </a:prstGeom>
+          <a:noFill/>
+          <a:ln/>
+        </p:spPr>
+        <p:txBody>
+          <a:bodyPr wrap="square" rtlCol="0" anchor="ctr"/>
+          <a:lstStyle/>
+          <a:p>
+            <a:pPr indent="0" marL="0">
+              <a:lnSpc>
+                <a:spcPct val="105000"/>
+              </a:lnSpc>
+              <a:buNone/>
+            </a:pPr>
+            <a:r>
+              <a:rPr lang="en-US" sz="1400" dirty="0">
+                <a:solidFill>
+                  <a:srgbClr val="5B6B7D"/>
+                </a:solidFill>
+                <a:latin typeface="Calibri" pitchFamily="34" charset="0"/>
+                <a:ea typeface="Calibri" pitchFamily="34" charset="-122"/>
+                <a:cs typeface="Calibri" pitchFamily="34" charset="-120"/>
+              </a:rPr>
+              <a:t>Chinese commitments to Nepal run to hundreds of millions; the disbursements Nepal actually records fell to about $14m by FY2022/23. The headline numbers are pledges, not cash. A measurement fact, stated neutrally.</a:t>
+            </a:r>
+            <a:endParaRPr lang="en-US" sz="1400" dirty="0"/>
+          </a:p>
+        </p:txBody>
+      </p:sp>
+      <p:sp>
+        <p:nvSpPr>
+          <p:cNvPr id="13" name="Text 11"/>
+          <p:cNvSpPr/>
+          <p:nvPr/>
+        </p:nvSpPr>
+        <p:spPr>
+          <a:xfrm>
+            <a:off x="502920" y="6437376"/>
+            <a:ext cx="8961120" cy="274320"/>
+          </a:xfrm>
+          <a:prstGeom prst="rect">
+            <a:avLst/>
+          </a:prstGeom>
+          <a:noFill/>
+          <a:ln/>
+        </p:spPr>
+        <p:txBody>
+          <a:bodyPr wrap="square" rtlCol="0" anchor="ctr"/>
+          <a:lstStyle/>
+          <a:p>
+            <a:pPr indent="0" marL="0">
+              <a:buNone/>
+            </a:pPr>
+            <a:r>
+              <a:rPr lang="en-US" sz="900" dirty="0">
+                <a:solidFill>
+                  <a:srgbClr val="5B6B7D"/>
+                </a:solidFill>
+                <a:latin typeface="Calibri" pitchFamily="34" charset="0"/>
+                <a:ea typeface="Calibri" pitchFamily="34" charset="-122"/>
+                <a:cs typeface="Calibri" pitchFamily="34" charset="-120"/>
+              </a:rPr>
+              <a:t>External Development Funding to Nepal  ·  built from primary sources, retrieved 2026</a:t>
+            </a:r>
+            <a:endParaRPr lang="en-US" sz="900" dirty="0"/>
+          </a:p>
+        </p:txBody>
+      </p:sp>
+      <p:sp>
+        <p:nvSpPr>
+          <p:cNvPr id="14" name="Text 12"/>
+          <p:cNvSpPr/>
+          <p:nvPr/>
+        </p:nvSpPr>
+        <p:spPr>
+          <a:xfrm>
+            <a:off x="11338560" y="6400800"/>
+            <a:ext cx="548640" cy="274320"/>
+          </a:xfrm>
+          <a:prstGeom prst="rect">
+            <a:avLst/>
+          </a:prstGeom>
+          <a:noFill/>
+          <a:ln/>
+        </p:spPr>
+        <p:txBody>
+          <a:bodyPr wrap="square" rtlCol="0" anchor="ctr"/>
+          <a:lstStyle/>
+          <a:p>
+            <a:pPr algn="r" indent="0" marL="0">
+              <a:buNone/>
+            </a:pPr>
+            <a:r>
+              <a:rPr lang="en-US" sz="1000" dirty="0">
+                <a:solidFill>
+                  <a:srgbClr val="5B6B7D"/>
+                </a:solidFill>
+                <a:latin typeface="Calibri" pitchFamily="34" charset="0"/>
+                <a:ea typeface="Calibri" pitchFamily="34" charset="-122"/>
+                <a:cs typeface="Calibri" pitchFamily="34" charset="-120"/>
+              </a:rPr>
+              <a:t>7</a:t>
+            </a:r>
+            <a:endParaRPr lang="en-US" sz="1000" dirty="0"/>
           </a:p>
         </p:txBody>
       </p:sp>
@@ -7270,7 +8051,7 @@
                 <a:ea typeface="Calibri" pitchFamily="34" charset="-122"/>
                 <a:cs typeface="Calibri" pitchFamily="34" charset="-120"/>
               </a:rPr>
-              <a:t>FOR NEPAL  </a:t>
+              <a:t>ACCOUNTABILITY  </a:t>
             </a:r>
             <a:pPr indent="0" marL="0">
               <a:buNone/>
@@ -7284,7 +8065,7 @@
                 <a:ea typeface="Calibri" pitchFamily="34" charset="-122"/>
                 <a:cs typeface="Calibri" pitchFamily="34" charset="-120"/>
               </a:rPr>
-              <a:t>नेपालका लागि</a:t>
+              <a:t>जवाफदेहिता</a:t>
             </a:r>
             <a:endParaRPr lang="en-US" sz="1200" dirty="0"/>
           </a:p>
@@ -7323,7 +8104,7 @@
                 <a:ea typeface="Georgia" pitchFamily="34" charset="-122"/>
                 <a:cs typeface="Georgia" pitchFamily="34" charset="-120"/>
               </a:rPr>
-              <a:t>What this puts in Nepal's hands</a:t>
+              <a:t>What the auditors found</a:t>
             </a:r>
             <a:endParaRPr lang="en-US" sz="3300" dirty="0"/>
           </a:p>
@@ -7331,16 +8112,89 @@
       </p:sp>
       <p:sp>
         <p:nvSpPr>
-          <p:cNvPr id="5" name="Shape 3"/>
-          <p:cNvSpPr/>
-          <p:nvPr/>
-        </p:nvSpPr>
-        <p:spPr>
-          <a:xfrm>
-            <a:off x="640080" y="2057400"/>
-            <a:ext cx="566928" cy="566928"/>
-          </a:xfrm>
-          <a:prstGeom prst="ellipse">
+          <p:cNvPr id="5" name="Text 3"/>
+          <p:cNvSpPr/>
+          <p:nvPr/>
+        </p:nvSpPr>
+        <p:spPr>
+          <a:xfrm>
+            <a:off x="502920" y="1783080"/>
+            <a:ext cx="10972800" cy="365760"/>
+          </a:xfrm>
+          <a:prstGeom prst="rect">
+            <a:avLst/>
+          </a:prstGeom>
+          <a:noFill/>
+          <a:ln/>
+        </p:spPr>
+        <p:txBody>
+          <a:bodyPr wrap="square" rtlCol="0" anchor="ctr"/>
+          <a:lstStyle/>
+          <a:p>
+            <a:pPr indent="0" marL="0">
+              <a:buNone/>
+            </a:pPr>
+            <a:r>
+              <a:rPr lang="en-US" sz="1500" dirty="0">
+                <a:solidFill>
+                  <a:srgbClr val="5B6B7D"/>
+                </a:solidFill>
+                <a:latin typeface="Calibri" pitchFamily="34" charset="0"/>
+                <a:ea typeface="Calibri" pitchFamily="34" charset="-122"/>
+                <a:cs typeface="Calibri" pitchFamily="34" charset="-120"/>
+              </a:rPr>
+              <a:t>The US Inspector General audits its assistance to Nepal. We traced every Nepal audit we could find.</a:t>
+            </a:r>
+            <a:endParaRPr lang="en-US" sz="1500" dirty="0"/>
+          </a:p>
+        </p:txBody>
+      </p:sp>
+      <p:sp>
+        <p:nvSpPr>
+          <p:cNvPr id="6" name="Shape 4"/>
+          <p:cNvSpPr/>
+          <p:nvPr/>
+        </p:nvSpPr>
+        <p:spPr>
+          <a:xfrm>
+            <a:off x="640080" y="2468880"/>
+            <a:ext cx="5394960" cy="1691640"/>
+          </a:xfrm>
+          <a:prstGeom prst="roundRect">
+            <a:avLst>
+              <a:gd name="adj" fmla="val 4324"/>
+            </a:avLst>
+          </a:prstGeom>
+          <a:solidFill>
+            <a:srgbClr val="FFFFFF"/>
+          </a:solidFill>
+          <a:ln w="12700">
+            <a:solidFill>
+              <a:srgbClr val="DDE4EC"/>
+            </a:solidFill>
+            <a:prstDash val="solid"/>
+          </a:ln>
+          <a:effectLst>
+            <a:outerShdw sx="100000" sy="100000" kx="0" ky="0" algn="bl" rotWithShape="0" blurRad="114300" dist="25400" dir="5400000">
+              <a:srgbClr val="8895A7">
+                <a:alpha val="10000"/>
+              </a:srgbClr>
+            </a:outerShdw>
+          </a:effectLst>
+        </p:spPr>
+      </p:sp>
+      <p:sp>
+        <p:nvSpPr>
+          <p:cNvPr id="7" name="Shape 5"/>
+          <p:cNvSpPr/>
+          <p:nvPr/>
+        </p:nvSpPr>
+        <p:spPr>
+          <a:xfrm>
+            <a:off x="640080" y="2761488"/>
+            <a:ext cx="64008" cy="1106424"/>
+          </a:xfrm>
+          <a:prstGeom prst="rect">
             <a:avLst/>
           </a:prstGeom>
           <a:solidFill>
@@ -7351,69 +8205,69 @@
       </p:sp>
       <p:sp>
         <p:nvSpPr>
-          <p:cNvPr id="6" name="Text 4"/>
-          <p:cNvSpPr/>
-          <p:nvPr/>
-        </p:nvSpPr>
-        <p:spPr>
-          <a:xfrm>
-            <a:off x="640080" y="2057400"/>
-            <a:ext cx="566928" cy="566928"/>
-          </a:xfrm>
-          <a:prstGeom prst="rect">
-            <a:avLst/>
-          </a:prstGeom>
-          <a:noFill/>
-          <a:ln/>
-        </p:spPr>
-        <p:txBody>
-          <a:bodyPr wrap="square" rtlCol="0" anchor="ctr"/>
-          <a:lstStyle/>
-          <a:p>
-            <a:pPr algn="ctr" indent="0" marL="0">
-              <a:buNone/>
-            </a:pPr>
-            <a:r>
-              <a:rPr lang="en-US" sz="2200" b="1" dirty="0">
-                <a:solidFill>
-                  <a:srgbClr val="FFFFFF"/>
+          <p:cNvPr id="8" name="Text 6"/>
+          <p:cNvSpPr/>
+          <p:nvPr/>
+        </p:nvSpPr>
+        <p:spPr>
+          <a:xfrm>
+            <a:off x="896112" y="2633472"/>
+            <a:ext cx="4937760" cy="868680"/>
+          </a:xfrm>
+          <a:prstGeom prst="rect">
+            <a:avLst/>
+          </a:prstGeom>
+          <a:noFill/>
+          <a:ln/>
+        </p:spPr>
+        <p:txBody>
+          <a:bodyPr wrap="square" rtlCol="0" anchor="ctr"/>
+          <a:lstStyle/>
+          <a:p>
+            <a:pPr indent="0" marL="0">
+              <a:buNone/>
+            </a:pPr>
+            <a:r>
+              <a:rPr lang="en-US" sz="3400" b="1" dirty="0">
+                <a:solidFill>
+                  <a:srgbClr val="0E7C86"/>
                 </a:solidFill>
                 <a:latin typeface="Georgia" pitchFamily="34" charset="0"/>
                 <a:ea typeface="Georgia" pitchFamily="34" charset="-122"/>
                 <a:cs typeface="Georgia" pitchFamily="34" charset="-120"/>
               </a:rPr>
-              <a:t>1</a:t>
-            </a:r>
-            <a:endParaRPr lang="en-US" sz="2200" dirty="0"/>
-          </a:p>
-        </p:txBody>
-      </p:sp>
-      <p:sp>
-        <p:nvSpPr>
-          <p:cNvPr id="7" name="Text 5"/>
-          <p:cNvSpPr/>
-          <p:nvPr/>
-        </p:nvSpPr>
-        <p:spPr>
-          <a:xfrm>
-            <a:off x="1417320" y="2020824"/>
-            <a:ext cx="9829800" cy="384048"/>
-          </a:xfrm>
-          <a:prstGeom prst="rect">
-            <a:avLst/>
-          </a:prstGeom>
-          <a:noFill/>
-          <a:ln/>
-        </p:spPr>
-        <p:txBody>
-          <a:bodyPr wrap="square" rtlCol="0" anchor="ctr"/>
-          <a:lstStyle/>
-          <a:p>
-            <a:pPr indent="0" marL="0">
-              <a:buNone/>
-            </a:pPr>
-            <a:r>
-              <a:rPr lang="en-US" sz="1700" b="1" dirty="0">
+              <a:t>$323,161</a:t>
+            </a:r>
+            <a:endParaRPr lang="en-US" sz="3400" dirty="0"/>
+          </a:p>
+        </p:txBody>
+      </p:sp>
+      <p:sp>
+        <p:nvSpPr>
+          <p:cNvPr id="9" name="Text 7"/>
+          <p:cNvSpPr/>
+          <p:nvPr/>
+        </p:nvSpPr>
+        <p:spPr>
+          <a:xfrm>
+            <a:off x="896112" y="3419856"/>
+            <a:ext cx="4983480" cy="603504"/>
+          </a:xfrm>
+          <a:prstGeom prst="rect">
+            <a:avLst/>
+          </a:prstGeom>
+          <a:noFill/>
+          <a:ln/>
+        </p:spPr>
+        <p:txBody>
+          <a:bodyPr wrap="square" rtlCol="0" anchor="t"/>
+          <a:lstStyle/>
+          <a:p>
+            <a:pPr indent="0" marL="0">
+              <a:buNone/>
+            </a:pPr>
+            <a:r>
+              <a:rPr lang="en-US" sz="1250" dirty="0">
                 <a:solidFill>
                   <a:srgbClr val="12233B"/>
                 </a:solidFill>
@@ -7421,66 +8275,58 @@
                 <a:ea typeface="Calibri" pitchFamily="34" charset="-122"/>
                 <a:cs typeface="Calibri" pitchFamily="34" charset="-120"/>
               </a:rPr>
-              <a:t>A planning instrument for the gap</a:t>
-            </a:r>
-            <a:endParaRPr lang="en-US" sz="1700" dirty="0"/>
-          </a:p>
-        </p:txBody>
-      </p:sp>
-      <p:sp>
-        <p:nvSpPr>
-          <p:cNvPr id="8" name="Text 6"/>
-          <p:cNvSpPr/>
-          <p:nvPr/>
-        </p:nvSpPr>
-        <p:spPr>
-          <a:xfrm>
-            <a:off x="1417320" y="2423160"/>
-            <a:ext cx="9829800" cy="914400"/>
-          </a:xfrm>
-          <a:prstGeom prst="rect">
-            <a:avLst/>
-          </a:prstGeom>
-          <a:noFill/>
-          <a:ln/>
-        </p:spPr>
-        <p:txBody>
-          <a:bodyPr wrap="square" rtlCol="0" anchor="ctr"/>
-          <a:lstStyle/>
-          <a:p>
-            <a:pPr indent="0" marL="0">
-              <a:lnSpc>
-                <a:spcPct val="102000"/>
-              </a:lnSpc>
-              <a:buNone/>
-            </a:pPr>
-            <a:r>
-              <a:rPr lang="en-US" sz="1300" dirty="0">
-                <a:solidFill>
-                  <a:srgbClr val="5B6B7D"/>
-                </a:solidFill>
-                <a:latin typeface="Calibri" pitchFamily="34" charset="0"/>
-                <a:ea typeface="Calibri" pitchFamily="34" charset="-122"/>
-                <a:cs typeface="Calibri" pitchFamily="34" charset="-120"/>
-              </a:rPr>
-              <a:t>Which sectors lost their pipeline in 2025 — health and governance most — so the budget can respond with evidence, not guesswork.</a:t>
-            </a:r>
-            <a:endParaRPr lang="en-US" sz="1300" dirty="0"/>
-          </a:p>
-        </p:txBody>
-      </p:sp>
-      <p:sp>
-        <p:nvSpPr>
-          <p:cNvPr id="9" name="Shape 7"/>
-          <p:cNvSpPr/>
-          <p:nvPr/>
-        </p:nvSpPr>
-        <p:spPr>
-          <a:xfrm>
-            <a:off x="640080" y="3429000"/>
-            <a:ext cx="566928" cy="566928"/>
-          </a:xfrm>
-          <a:prstGeom prst="ellipse">
+              <a:t>total questioned costs across 7 audits — just 0.016% of the $2.0bn delivered</a:t>
+            </a:r>
+            <a:endParaRPr lang="en-US" sz="1250" dirty="0"/>
+          </a:p>
+        </p:txBody>
+      </p:sp>
+      <p:sp>
+        <p:nvSpPr>
+          <p:cNvPr id="10" name="Shape 8"/>
+          <p:cNvSpPr/>
+          <p:nvPr/>
+        </p:nvSpPr>
+        <p:spPr>
+          <a:xfrm>
+            <a:off x="6172200" y="2468880"/>
+            <a:ext cx="5394960" cy="1691640"/>
+          </a:xfrm>
+          <a:prstGeom prst="roundRect">
+            <a:avLst>
+              <a:gd name="adj" fmla="val 4324"/>
+            </a:avLst>
+          </a:prstGeom>
+          <a:solidFill>
+            <a:srgbClr val="FFFFFF"/>
+          </a:solidFill>
+          <a:ln w="12700">
+            <a:solidFill>
+              <a:srgbClr val="DDE4EC"/>
+            </a:solidFill>
+            <a:prstDash val="solid"/>
+          </a:ln>
+          <a:effectLst>
+            <a:outerShdw sx="100000" sy="100000" kx="0" ky="0" algn="bl" rotWithShape="0" blurRad="114300" dist="25400" dir="5400000">
+              <a:srgbClr val="8895A7">
+                <a:alpha val="10000"/>
+              </a:srgbClr>
+            </a:outerShdw>
+          </a:effectLst>
+        </p:spPr>
+      </p:sp>
+      <p:sp>
+        <p:nvSpPr>
+          <p:cNvPr id="11" name="Shape 9"/>
+          <p:cNvSpPr/>
+          <p:nvPr/>
+        </p:nvSpPr>
+        <p:spPr>
+          <a:xfrm>
+            <a:off x="6172200" y="2761488"/>
+            <a:ext cx="64008" cy="1106424"/>
+          </a:xfrm>
+          <a:prstGeom prst="rect">
             <a:avLst/>
           </a:prstGeom>
           <a:solidFill>
@@ -7491,69 +8337,69 @@
       </p:sp>
       <p:sp>
         <p:nvSpPr>
-          <p:cNvPr id="10" name="Text 8"/>
-          <p:cNvSpPr/>
-          <p:nvPr/>
-        </p:nvSpPr>
-        <p:spPr>
-          <a:xfrm>
-            <a:off x="640080" y="3429000"/>
-            <a:ext cx="566928" cy="566928"/>
-          </a:xfrm>
-          <a:prstGeom prst="rect">
-            <a:avLst/>
-          </a:prstGeom>
-          <a:noFill/>
-          <a:ln/>
-        </p:spPr>
-        <p:txBody>
-          <a:bodyPr wrap="square" rtlCol="0" anchor="ctr"/>
-          <a:lstStyle/>
-          <a:p>
-            <a:pPr algn="ctr" indent="0" marL="0">
-              <a:buNone/>
-            </a:pPr>
-            <a:r>
-              <a:rPr lang="en-US" sz="2200" b="1" dirty="0">
-                <a:solidFill>
-                  <a:srgbClr val="FFFFFF"/>
+          <p:cNvPr id="12" name="Text 10"/>
+          <p:cNvSpPr/>
+          <p:nvPr/>
+        </p:nvSpPr>
+        <p:spPr>
+          <a:xfrm>
+            <a:off x="6428232" y="2633472"/>
+            <a:ext cx="4937760" cy="868680"/>
+          </a:xfrm>
+          <a:prstGeom prst="rect">
+            <a:avLst/>
+          </a:prstGeom>
+          <a:noFill/>
+          <a:ln/>
+        </p:spPr>
+        <p:txBody>
+          <a:bodyPr wrap="square" rtlCol="0" anchor="ctr"/>
+          <a:lstStyle/>
+          <a:p>
+            <a:pPr indent="0" marL="0">
+              <a:buNone/>
+            </a:pPr>
+            <a:r>
+              <a:rPr lang="en-US" sz="3400" b="1" dirty="0">
+                <a:solidFill>
+                  <a:srgbClr val="0D2440"/>
                 </a:solidFill>
                 <a:latin typeface="Georgia" pitchFamily="34" charset="0"/>
                 <a:ea typeface="Georgia" pitchFamily="34" charset="-122"/>
                 <a:cs typeface="Georgia" pitchFamily="34" charset="-120"/>
               </a:rPr>
-              <a:t>2</a:t>
-            </a:r>
-            <a:endParaRPr lang="en-US" sz="2200" dirty="0"/>
-          </a:p>
-        </p:txBody>
-      </p:sp>
-      <p:sp>
-        <p:nvSpPr>
-          <p:cNvPr id="11" name="Text 9"/>
-          <p:cNvSpPr/>
-          <p:nvPr/>
-        </p:nvSpPr>
-        <p:spPr>
-          <a:xfrm>
-            <a:off x="1417320" y="3392424"/>
-            <a:ext cx="9829800" cy="384048"/>
-          </a:xfrm>
-          <a:prstGeom prst="rect">
-            <a:avLst/>
-          </a:prstGeom>
-          <a:noFill/>
-          <a:ln/>
-        </p:spPr>
-        <p:txBody>
-          <a:bodyPr wrap="square" rtlCol="0" anchor="ctr"/>
-          <a:lstStyle/>
-          <a:p>
-            <a:pPr indent="0" marL="0">
-              <a:buNone/>
-            </a:pPr>
-            <a:r>
-              <a:rPr lang="en-US" sz="1700" b="1" dirty="0">
+              <a:t>4 of 7</a:t>
+            </a:r>
+            <a:endParaRPr lang="en-US" sz="3400" dirty="0"/>
+          </a:p>
+        </p:txBody>
+      </p:sp>
+      <p:sp>
+        <p:nvSpPr>
+          <p:cNvPr id="13" name="Text 11"/>
+          <p:cNvSpPr/>
+          <p:nvPr/>
+        </p:nvSpPr>
+        <p:spPr>
+          <a:xfrm>
+            <a:off x="6428232" y="3419856"/>
+            <a:ext cx="4983480" cy="603504"/>
+          </a:xfrm>
+          <a:prstGeom prst="rect">
+            <a:avLst/>
+          </a:prstGeom>
+          <a:noFill/>
+          <a:ln/>
+        </p:spPr>
+        <p:txBody>
+          <a:bodyPr wrap="square" rtlCol="0" anchor="t"/>
+          <a:lstStyle/>
+          <a:p>
+            <a:pPr indent="0" marL="0">
+              <a:buNone/>
+            </a:pPr>
+            <a:r>
+              <a:rPr lang="en-US" sz="1250" dirty="0">
                 <a:solidFill>
                   <a:srgbClr val="12233B"/>
                 </a:solidFill>
@@ -7561,22 +8407,49 @@
                 <a:ea typeface="Calibri" pitchFamily="34" charset="-122"/>
                 <a:cs typeface="Calibri" pitchFamily="34" charset="-120"/>
               </a:rPr>
-              <a:t>Information sovereignty</a:t>
-            </a:r>
-            <a:endParaRPr lang="en-US" sz="1700" dirty="0"/>
-          </a:p>
-        </p:txBody>
-      </p:sp>
-      <p:sp>
-        <p:nvSpPr>
-          <p:cNvPr id="12" name="Text 10"/>
-          <p:cNvSpPr/>
-          <p:nvPr/>
-        </p:nvSpPr>
-        <p:spPr>
-          <a:xfrm>
-            <a:off x="1417320" y="3794760"/>
-            <a:ext cx="9829800" cy="914400"/>
+              <a:t>audit PDFs archived here with checksums; the rest are now offline</a:t>
+            </a:r>
+            <a:endParaRPr lang="en-US" sz="1250" dirty="0"/>
+          </a:p>
+        </p:txBody>
+      </p:sp>
+      <p:sp>
+        <p:nvSpPr>
+          <p:cNvPr id="14" name="Shape 12"/>
+          <p:cNvSpPr/>
+          <p:nvPr/>
+        </p:nvSpPr>
+        <p:spPr>
+          <a:xfrm>
+            <a:off x="640080" y="4526280"/>
+            <a:ext cx="10927080" cy="1417320"/>
+          </a:xfrm>
+          <a:prstGeom prst="roundRect">
+            <a:avLst>
+              <a:gd name="adj" fmla="val 5161"/>
+            </a:avLst>
+          </a:prstGeom>
+          <a:solidFill>
+            <a:srgbClr val="E9F4F3"/>
+          </a:solidFill>
+          <a:ln w="12700">
+            <a:solidFill>
+              <a:srgbClr val="BFD8D6"/>
+            </a:solidFill>
+            <a:prstDash val="solid"/>
+          </a:ln>
+        </p:spPr>
+      </p:sp>
+      <p:sp>
+        <p:nvSpPr>
+          <p:cNvPr id="15" name="Text 13"/>
+          <p:cNvSpPr/>
+          <p:nvPr/>
+        </p:nvSpPr>
+        <p:spPr>
+          <a:xfrm>
+            <a:off x="914400" y="4709160"/>
+            <a:ext cx="10332720" cy="1051560"/>
           </a:xfrm>
           <a:prstGeom prst="rect">
             <a:avLst/>
@@ -7590,110 +8463,29 @@
           <a:p>
             <a:pPr indent="0" marL="0">
               <a:lnSpc>
-                <a:spcPct val="102000"/>
+                <a:spcPct val="105000"/>
               </a:lnSpc>
               <a:buNone/>
             </a:pPr>
             <a:r>
-              <a:rPr lang="en-US" sz="1300" dirty="0">
-                <a:solidFill>
-                  <a:srgbClr val="5B6B7D"/>
-                </a:solidFill>
-                <a:latin typeface="Calibri" pitchFamily="34" charset="0"/>
-                <a:ea typeface="Calibri" pitchFamily="34" charset="-122"/>
-                <a:cs typeface="Calibri" pitchFamily="34" charset="-120"/>
-              </a:rPr>
-              <a:t>Nepal stops depending on foreign portals it cannot control. The record is archived here and updates from Nepal's own AMIS / DCR system.</a:t>
-            </a:r>
-            <a:endParaRPr lang="en-US" sz="1300" dirty="0"/>
-          </a:p>
-        </p:txBody>
-      </p:sp>
-      <p:sp>
-        <p:nvSpPr>
-          <p:cNvPr id="13" name="Shape 11"/>
-          <p:cNvSpPr/>
-          <p:nvPr/>
-        </p:nvSpPr>
-        <p:spPr>
-          <a:xfrm>
-            <a:off x="640080" y="4800600"/>
-            <a:ext cx="566928" cy="566928"/>
-          </a:xfrm>
-          <a:prstGeom prst="ellipse">
-            <a:avLst/>
-          </a:prstGeom>
-          <a:solidFill>
-            <a:srgbClr val="E08A00"/>
-          </a:solidFill>
-          <a:ln/>
-        </p:spPr>
-      </p:sp>
-      <p:sp>
-        <p:nvSpPr>
-          <p:cNvPr id="14" name="Text 12"/>
-          <p:cNvSpPr/>
-          <p:nvPr/>
-        </p:nvSpPr>
-        <p:spPr>
-          <a:xfrm>
-            <a:off x="640080" y="4800600"/>
-            <a:ext cx="566928" cy="566928"/>
-          </a:xfrm>
-          <a:prstGeom prst="rect">
-            <a:avLst/>
-          </a:prstGeom>
-          <a:noFill/>
-          <a:ln/>
-        </p:spPr>
-        <p:txBody>
-          <a:bodyPr wrap="square" rtlCol="0" anchor="ctr"/>
-          <a:lstStyle/>
-          <a:p>
-            <a:pPr algn="ctr" indent="0" marL="0">
-              <a:buNone/>
-            </a:pPr>
-            <a:r>
-              <a:rPr lang="en-US" sz="2200" b="1" dirty="0">
-                <a:solidFill>
-                  <a:srgbClr val="FFFFFF"/>
-                </a:solidFill>
-                <a:latin typeface="Georgia" pitchFamily="34" charset="0"/>
-                <a:ea typeface="Georgia" pitchFamily="34" charset="-122"/>
-                <a:cs typeface="Georgia" pitchFamily="34" charset="-120"/>
-              </a:rPr>
-              <a:t>3</a:t>
-            </a:r>
-            <a:endParaRPr lang="en-US" sz="2200" dirty="0"/>
-          </a:p>
-        </p:txBody>
-      </p:sp>
-      <p:sp>
-        <p:nvSpPr>
-          <p:cNvPr id="15" name="Text 13"/>
-          <p:cNvSpPr/>
-          <p:nvPr/>
-        </p:nvSpPr>
-        <p:spPr>
-          <a:xfrm>
-            <a:off x="1417320" y="4764024"/>
-            <a:ext cx="9829800" cy="384048"/>
-          </a:xfrm>
-          <a:prstGeom prst="rect">
-            <a:avLst/>
-          </a:prstGeom>
-          <a:noFill/>
-          <a:ln/>
-        </p:spPr>
-        <p:txBody>
-          <a:bodyPr wrap="square" rtlCol="0" anchor="ctr"/>
-          <a:lstStyle/>
-          <a:p>
-            <a:pPr indent="0" marL="0">
-              <a:buNone/>
-            </a:pPr>
-            <a:r>
-              <a:rPr lang="en-US" sz="1700" b="1" dirty="0">
+              <a:rPr lang="en-US" sz="1400" b="1" dirty="0">
+                <a:solidFill>
+                  <a:srgbClr val="0E7C86"/>
+                </a:solidFill>
+                <a:latin typeface="Calibri" pitchFamily="34" charset="0"/>
+                <a:ea typeface="Calibri" pitchFamily="34" charset="-122"/>
+                <a:cs typeface="Calibri" pitchFamily="34" charset="-120"/>
+              </a:rPr>
+              <a:t>What this means:  </a:t>
+            </a:r>
+            <a:pPr indent="0" marL="0">
+              <a:lnSpc>
+                <a:spcPct val="105000"/>
+              </a:lnSpc>
+              <a:buNone/>
+            </a:pPr>
+            <a:r>
+              <a:rPr lang="en-US" sz="1400" dirty="0">
                 <a:solidFill>
                   <a:srgbClr val="12233B"/>
                 </a:solidFill>
@@ -7701,57 +8493,15 @@
                 <a:ea typeface="Calibri" pitchFamily="34" charset="-122"/>
                 <a:cs typeface="Calibri" pitchFamily="34" charset="-120"/>
               </a:rPr>
-              <a:t>A public transparency portal</a:t>
-            </a:r>
-            <a:endParaRPr lang="en-US" sz="1700" dirty="0"/>
+              <a:t>questioned costs were small ineligible-or-unsupported items, mostly on funds the Government of Nepal managed directly. Financial control was reasonable — and the accountability trail is preserved here even as USAID's own document server goes dark.</a:t>
+            </a:r>
+            <a:endParaRPr lang="en-US" sz="1400" dirty="0"/>
           </a:p>
         </p:txBody>
       </p:sp>
       <p:sp>
         <p:nvSpPr>
           <p:cNvPr id="16" name="Text 14"/>
-          <p:cNvSpPr/>
-          <p:nvPr/>
-        </p:nvSpPr>
-        <p:spPr>
-          <a:xfrm>
-            <a:off x="1417320" y="5166360"/>
-            <a:ext cx="9829800" cy="914400"/>
-          </a:xfrm>
-          <a:prstGeom prst="rect">
-            <a:avLst/>
-          </a:prstGeom>
-          <a:noFill/>
-          <a:ln/>
-        </p:spPr>
-        <p:txBody>
-          <a:bodyPr wrap="square" rtlCol="0" anchor="ctr"/>
-          <a:lstStyle/>
-          <a:p>
-            <a:pPr indent="0" marL="0">
-              <a:lnSpc>
-                <a:spcPct val="102000"/>
-              </a:lnSpc>
-              <a:buNone/>
-            </a:pPr>
-            <a:r>
-              <a:rPr lang="en-US" sz="1300" dirty="0">
-                <a:solidFill>
-                  <a:srgbClr val="5B6B7D"/>
-                </a:solidFill>
-                <a:latin typeface="Calibri" pitchFamily="34" charset="0"/>
-                <a:ea typeface="Calibri" pitchFamily="34" charset="-122"/>
-                <a:cs typeface="Calibri" pitchFamily="34" charset="-120"/>
-              </a:rPr>
-              <a:t>The interactive, bilingual companion to the Development Cooperation Report the Ministry of Finance already publishes — for citizens, parliament and partners.</a:t>
-            </a:r>
-            <a:endParaRPr lang="en-US" sz="1300" dirty="0"/>
-          </a:p>
-        </p:txBody>
-      </p:sp>
-      <p:sp>
-        <p:nvSpPr>
-          <p:cNvPr id="17" name="Text 15"/>
           <p:cNvSpPr/>
           <p:nvPr/>
         </p:nvSpPr>
@@ -7790,7 +8540,7 @@
       </p:sp>
       <p:sp>
         <p:nvSpPr>
-          <p:cNvPr id="18" name="Text 16"/>
+          <p:cNvPr id="17" name="Text 15"/>
           <p:cNvSpPr/>
           <p:nvPr/>
         </p:nvSpPr>
@@ -7868,27 +8618,7 @@
         <p:spPr>
           <a:xfrm>
             <a:off x="0" y="0"/>
-            <a:ext cx="12191695" cy="146304"/>
-          </a:xfrm>
-          <a:prstGeom prst="rect">
-            <a:avLst/>
-          </a:prstGeom>
-          <a:solidFill>
-            <a:srgbClr val="0E7C86"/>
-          </a:solidFill>
-          <a:ln/>
-        </p:spPr>
-      </p:sp>
-      <p:sp>
-        <p:nvSpPr>
-          <p:cNvPr id="3" name="Shape 1"/>
-          <p:cNvSpPr/>
-          <p:nvPr/>
-        </p:nvSpPr>
-        <p:spPr>
-          <a:xfrm>
-            <a:off x="0" y="146304"/>
-            <a:ext cx="12191695" cy="54864"/>
+            <a:ext cx="164592" cy="6858000"/>
           </a:xfrm>
           <a:prstGeom prst="rect">
             <a:avLst/>
@@ -7901,13 +8631,66 @@
       </p:sp>
       <p:sp>
         <p:nvSpPr>
+          <p:cNvPr id="3" name="Text 1"/>
+          <p:cNvSpPr/>
+          <p:nvPr/>
+        </p:nvSpPr>
+        <p:spPr>
+          <a:xfrm>
+            <a:off x="548640" y="457200"/>
+            <a:ext cx="8229600" cy="365760"/>
+          </a:xfrm>
+          <a:prstGeom prst="rect">
+            <a:avLst/>
+          </a:prstGeom>
+          <a:noFill/>
+          <a:ln/>
+        </p:spPr>
+        <p:txBody>
+          <a:bodyPr wrap="square" rtlCol="0" anchor="ctr"/>
+          <a:lstStyle/>
+          <a:p>
+            <a:pPr indent="0" marL="0">
+              <a:buNone/>
+            </a:pPr>
+            <a:r>
+              <a:rPr lang="en-US" sz="1200" b="1" spc="200" kern="0" dirty="0">
+                <a:solidFill>
+                  <a:srgbClr val="C0152F"/>
+                </a:solidFill>
+                <a:latin typeface="Calibri" pitchFamily="34" charset="0"/>
+                <a:ea typeface="Calibri" pitchFamily="34" charset="-122"/>
+                <a:cs typeface="Calibri" pitchFamily="34" charset="-120"/>
+              </a:rPr>
+              <a:t>HOW  </a:t>
+            </a:r>
+            <a:pPr indent="0" marL="0">
+              <a:buNone/>
+            </a:pPr>
+            <a:r>
+              <a:rPr lang="en-US" sz="1200" spc="200" kern="0" dirty="0">
+                <a:solidFill>
+                  <a:srgbClr val="0E7C86"/>
+                </a:solidFill>
+                <a:latin typeface="Calibri" pitchFamily="34" charset="0"/>
+                <a:ea typeface="Calibri" pitchFamily="34" charset="-122"/>
+                <a:cs typeface="Calibri" pitchFamily="34" charset="-120"/>
+              </a:rPr>
+              <a:t>कसरी</a:t>
+            </a:r>
+            <a:endParaRPr lang="en-US" sz="1200" dirty="0"/>
+          </a:p>
+        </p:txBody>
+      </p:sp>
+      <p:sp>
+        <p:nvSpPr>
           <p:cNvPr id="4" name="Text 2"/>
           <p:cNvSpPr/>
           <p:nvPr/>
         </p:nvSpPr>
         <p:spPr>
           <a:xfrm>
-            <a:off x="731520" y="2286000"/>
+            <a:off x="502920" y="868680"/>
             <a:ext cx="10972800" cy="914400"/>
           </a:xfrm>
           <a:prstGeom prst="rect">
@@ -7924,7 +8707,7 @@
               <a:buNone/>
             </a:pPr>
             <a:r>
-              <a:rPr lang="en-US" sz="4400" b="1" dirty="0">
+              <a:rPr lang="en-US" sz="3300" b="1" dirty="0">
                 <a:solidFill>
                   <a:srgbClr val="FFFFFF"/>
                 </a:solidFill>
@@ -7932,73 +8715,38 @@
                 <a:ea typeface="Georgia" pitchFamily="34" charset="-122"/>
                 <a:cs typeface="Georgia" pitchFamily="34" charset="-120"/>
               </a:rPr>
-              <a:t>The record is Nepal's.</a:t>
-            </a:r>
-            <a:endParaRPr lang="en-US" sz="4400" dirty="0"/>
-          </a:p>
-        </p:txBody>
-      </p:sp>
-      <p:sp>
-        <p:nvSpPr>
-          <p:cNvPr id="5" name="Text 3"/>
-          <p:cNvSpPr/>
-          <p:nvPr/>
-        </p:nvSpPr>
-        <p:spPr>
-          <a:xfrm>
-            <a:off x="749808" y="3566160"/>
-            <a:ext cx="10515600" cy="1097280"/>
-          </a:xfrm>
-          <a:prstGeom prst="rect">
-            <a:avLst/>
-          </a:prstGeom>
-          <a:noFill/>
-          <a:ln/>
-        </p:spPr>
-        <p:txBody>
-          <a:bodyPr wrap="square" rtlCol="0" anchor="ctr"/>
-          <a:lstStyle/>
-          <a:p>
-            <a:pPr indent="0" marL="0">
-              <a:lnSpc>
-                <a:spcPct val="110000"/>
-              </a:lnSpc>
-              <a:buNone/>
-            </a:pPr>
-            <a:r>
-              <a:rPr lang="en-US" sz="1800" dirty="0">
-                <a:solidFill>
-                  <a:srgbClr val="CADCFC"/>
-                </a:solidFill>
-                <a:latin typeface="Calibri" pitchFamily="34" charset="0"/>
-                <a:ea typeface="Calibri" pitchFamily="34" charset="-122"/>
-                <a:cs typeface="Calibri" pitchFamily="34" charset="-120"/>
-              </a:rPr>
-              <a:t>Built from official sources, kept verifiable, told in two languages —</a:t>
-            </a:r>
-            <a:endParaRPr lang="en-US" sz="1800" dirty="0"/>
-          </a:p>
-          <a:p>
-            <a:pPr indent="0" marL="0">
-              <a:lnSpc>
-                <a:spcPct val="110000"/>
-              </a:lnSpc>
-              <a:buNone/>
-            </a:pPr>
-            <a:r>
-              <a:rPr lang="en-US" sz="1800" dirty="0">
-                <a:solidFill>
-                  <a:srgbClr val="CADCFC"/>
-                </a:solidFill>
-                <a:latin typeface="Calibri" pitchFamily="34" charset="0"/>
-                <a:ea typeface="Calibri" pitchFamily="34" charset="-122"/>
-                <a:cs typeface="Calibri" pitchFamily="34" charset="-120"/>
-              </a:rPr>
-              <a:t>so the question “where did the money go?” always has an answer.</a:t>
-            </a:r>
-            <a:endParaRPr lang="en-US" sz="1800" dirty="0"/>
-          </a:p>
-        </p:txBody>
+              <a:t>Trust is built into the method</a:t>
+            </a:r>
+            <a:endParaRPr lang="en-US" sz="3300" dirty="0"/>
+          </a:p>
+        </p:txBody>
+      </p:sp>
+      <p:sp>
+        <p:nvSpPr>
+          <p:cNvPr id="5" name="Shape 3"/>
+          <p:cNvSpPr/>
+          <p:nvPr/>
+        </p:nvSpPr>
+        <p:spPr>
+          <a:xfrm>
+            <a:off x="640080" y="2148840"/>
+            <a:ext cx="5257800" cy="1143000"/>
+          </a:xfrm>
+          <a:prstGeom prst="roundRect">
+            <a:avLst>
+              <a:gd name="adj" fmla="val 4800"/>
+            </a:avLst>
+          </a:prstGeom>
+          <a:solidFill>
+            <a:srgbClr val="15315A"/>
+          </a:solidFill>
+          <a:ln w="12700">
+            <a:solidFill>
+              <a:srgbClr val="24487A"/>
+            </a:solidFill>
+            <a:prstDash val="solid"/>
+          </a:ln>
+        </p:spPr>
       </p:sp>
       <p:sp>
         <p:nvSpPr>
@@ -8008,87 +8756,871 @@
         </p:nvSpPr>
         <p:spPr>
           <a:xfrm>
-            <a:off x="749808" y="5120640"/>
-            <a:ext cx="10607040" cy="548640"/>
-          </a:xfrm>
-          <a:prstGeom prst="rect">
-            <a:avLst/>
-          </a:prstGeom>
-          <a:noFill/>
-          <a:ln/>
-        </p:spPr>
-        <p:txBody>
-          <a:bodyPr wrap="square" rtlCol="0" anchor="ctr"/>
-          <a:lstStyle/>
-          <a:p>
-            <a:pPr indent="0" marL="0">
-              <a:buNone/>
-            </a:pPr>
-            <a:r>
-              <a:rPr lang="en-US" sz="1400" b="1" dirty="0">
-                <a:solidFill>
-                  <a:srgbClr val="FFFFFF"/>
-                </a:solidFill>
-                <a:latin typeface="Calibri" pitchFamily="34" charset="0"/>
-                <a:ea typeface="Calibri" pitchFamily="34" charset="-122"/>
-                <a:cs typeface="Calibri" pitchFamily="34" charset="-120"/>
-              </a:rPr>
-              <a:t>Discuss next:  </a:t>
-            </a:r>
-            <a:pPr indent="0" marL="0">
-              <a:buNone/>
-            </a:pPr>
-            <a:r>
-              <a:rPr lang="en-US" sz="1400" dirty="0">
-                <a:solidFill>
-                  <a:srgbClr val="9FB6D4"/>
-                </a:solidFill>
-                <a:latin typeface="Calibri" pitchFamily="34" charset="0"/>
-                <a:ea typeface="Calibri" pitchFamily="34" charset="-122"/>
-                <a:cs typeface="Calibri" pitchFamily="34" charset="-120"/>
-              </a:rPr>
-              <a:t>connect it to AMIS  ·  publish it through IECCD  ·  let Nepal contest the classifications</a:t>
-            </a:r>
-            <a:endParaRPr lang="en-US" sz="1400" dirty="0"/>
-          </a:p>
-        </p:txBody>
-      </p:sp>
-      <p:sp>
-        <p:nvSpPr>
-          <p:cNvPr id="7" name="Text 5"/>
-          <p:cNvSpPr/>
-          <p:nvPr/>
-        </p:nvSpPr>
-        <p:spPr>
-          <a:xfrm>
-            <a:off x="749808" y="5897880"/>
-            <a:ext cx="10058400" cy="457200"/>
-          </a:xfrm>
-          <a:prstGeom prst="rect">
-            <a:avLst/>
-          </a:prstGeom>
-          <a:noFill/>
-          <a:ln/>
-        </p:spPr>
-        <p:txBody>
-          <a:bodyPr wrap="square" rtlCol="0" anchor="ctr"/>
-          <a:lstStyle/>
-          <a:p>
-            <a:pPr indent="0" marL="0">
-              <a:buNone/>
-            </a:pPr>
-            <a:r>
-              <a:rPr lang="en-US" sz="1800" i="1" dirty="0">
-                <a:solidFill>
-                  <a:srgbClr val="0E7C86"/>
+            <a:off x="822960" y="2313432"/>
+            <a:ext cx="502920" cy="502920"/>
+          </a:xfrm>
+          <a:prstGeom prst="rect">
+            <a:avLst/>
+          </a:prstGeom>
+          <a:noFill/>
+          <a:ln/>
+        </p:spPr>
+        <p:txBody>
+          <a:bodyPr wrap="square" rtlCol="0" anchor="ctr"/>
+          <a:lstStyle/>
+          <a:p>
+            <a:pPr algn="ctr" indent="0" marL="0">
+              <a:buNone/>
+            </a:pPr>
+            <a:r>
+              <a:rPr lang="en-US" sz="2200" b="1" dirty="0">
+                <a:solidFill>
+                  <a:srgbClr val="6FE3B8"/>
                 </a:solidFill>
                 <a:latin typeface="Georgia" pitchFamily="34" charset="0"/>
                 <a:ea typeface="Georgia" pitchFamily="34" charset="-122"/>
                 <a:cs typeface="Georgia" pitchFamily="34" charset="-120"/>
               </a:rPr>
-              <a:t>धन्यवाद  ·  Thank you</a:t>
-            </a:r>
-            <a:endParaRPr lang="en-US" sz="1800" dirty="0"/>
+              <a:t>✓</a:t>
+            </a:r>
+            <a:endParaRPr lang="en-US" sz="2200" dirty="0"/>
+          </a:p>
+        </p:txBody>
+      </p:sp>
+      <p:sp>
+        <p:nvSpPr>
+          <p:cNvPr id="7" name="Text 5"/>
+          <p:cNvSpPr/>
+          <p:nvPr/>
+        </p:nvSpPr>
+        <p:spPr>
+          <a:xfrm>
+            <a:off x="1417320" y="2295144"/>
+            <a:ext cx="4297680" cy="365760"/>
+          </a:xfrm>
+          <a:prstGeom prst="rect">
+            <a:avLst/>
+          </a:prstGeom>
+          <a:noFill/>
+          <a:ln/>
+        </p:spPr>
+        <p:txBody>
+          <a:bodyPr wrap="square" rtlCol="0" anchor="ctr"/>
+          <a:lstStyle/>
+          <a:p>
+            <a:pPr indent="0" marL="0">
+              <a:buNone/>
+            </a:pPr>
+            <a:r>
+              <a:rPr lang="en-US" sz="1500" b="1" dirty="0">
+                <a:solidFill>
+                  <a:srgbClr val="FFFFFF"/>
+                </a:solidFill>
+                <a:latin typeface="Calibri" pitchFamily="34" charset="0"/>
+                <a:ea typeface="Calibri" pitchFamily="34" charset="-122"/>
+                <a:cs typeface="Calibri" pitchFamily="34" charset="-120"/>
+              </a:rPr>
+              <a:t>Primary sources only</a:t>
+            </a:r>
+            <a:endParaRPr lang="en-US" sz="1500" dirty="0"/>
+          </a:p>
+        </p:txBody>
+      </p:sp>
+      <p:sp>
+        <p:nvSpPr>
+          <p:cNvPr id="8" name="Text 6"/>
+          <p:cNvSpPr/>
+          <p:nvPr/>
+        </p:nvSpPr>
+        <p:spPr>
+          <a:xfrm>
+            <a:off x="1417320" y="2651760"/>
+            <a:ext cx="4343400" cy="566928"/>
+          </a:xfrm>
+          <a:prstGeom prst="rect">
+            <a:avLst/>
+          </a:prstGeom>
+          <a:noFill/>
+          <a:ln/>
+        </p:spPr>
+        <p:txBody>
+          <a:bodyPr wrap="square" rtlCol="0" anchor="ctr"/>
+          <a:lstStyle/>
+          <a:p>
+            <a:pPr indent="0" marL="0">
+              <a:buNone/>
+            </a:pPr>
+            <a:r>
+              <a:rPr lang="en-US" sz="1150" dirty="0">
+                <a:solidFill>
+                  <a:srgbClr val="CADCFC"/>
+                </a:solidFill>
+                <a:latin typeface="Calibri" pitchFamily="34" charset="0"/>
+                <a:ea typeface="Calibri" pitchFamily="34" charset="-122"/>
+                <a:cs typeface="Calibri" pitchFamily="34" charset="-120"/>
+              </a:rPr>
+              <a:t>Government and multilateral systems directly — no aggregators, no guesses.</a:t>
+            </a:r>
+            <a:endParaRPr lang="en-US" sz="1150" dirty="0"/>
+          </a:p>
+        </p:txBody>
+      </p:sp>
+      <p:sp>
+        <p:nvSpPr>
+          <p:cNvPr id="9" name="Shape 7"/>
+          <p:cNvSpPr/>
+          <p:nvPr/>
+        </p:nvSpPr>
+        <p:spPr>
+          <a:xfrm>
+            <a:off x="6172200" y="2148840"/>
+            <a:ext cx="5257800" cy="1143000"/>
+          </a:xfrm>
+          <a:prstGeom prst="roundRect">
+            <a:avLst>
+              <a:gd name="adj" fmla="val 4800"/>
+            </a:avLst>
+          </a:prstGeom>
+          <a:solidFill>
+            <a:srgbClr val="15315A"/>
+          </a:solidFill>
+          <a:ln w="12700">
+            <a:solidFill>
+              <a:srgbClr val="24487A"/>
+            </a:solidFill>
+            <a:prstDash val="solid"/>
+          </a:ln>
+        </p:spPr>
+      </p:sp>
+      <p:sp>
+        <p:nvSpPr>
+          <p:cNvPr id="10" name="Text 8"/>
+          <p:cNvSpPr/>
+          <p:nvPr/>
+        </p:nvSpPr>
+        <p:spPr>
+          <a:xfrm>
+            <a:off x="6355080" y="2313432"/>
+            <a:ext cx="502920" cy="502920"/>
+          </a:xfrm>
+          <a:prstGeom prst="rect">
+            <a:avLst/>
+          </a:prstGeom>
+          <a:noFill/>
+          <a:ln/>
+        </p:spPr>
+        <p:txBody>
+          <a:bodyPr wrap="square" rtlCol="0" anchor="ctr"/>
+          <a:lstStyle/>
+          <a:p>
+            <a:pPr algn="ctr" indent="0" marL="0">
+              <a:buNone/>
+            </a:pPr>
+            <a:r>
+              <a:rPr lang="en-US" sz="2200" b="1" dirty="0">
+                <a:solidFill>
+                  <a:srgbClr val="6FE3B8"/>
+                </a:solidFill>
+                <a:latin typeface="Georgia" pitchFamily="34" charset="0"/>
+                <a:ea typeface="Georgia" pitchFamily="34" charset="-122"/>
+                <a:cs typeface="Georgia" pitchFamily="34" charset="-120"/>
+              </a:rPr>
+              <a:t>✓</a:t>
+            </a:r>
+            <a:endParaRPr lang="en-US" sz="2200" dirty="0"/>
+          </a:p>
+        </p:txBody>
+      </p:sp>
+      <p:sp>
+        <p:nvSpPr>
+          <p:cNvPr id="11" name="Text 9"/>
+          <p:cNvSpPr/>
+          <p:nvPr/>
+        </p:nvSpPr>
+        <p:spPr>
+          <a:xfrm>
+            <a:off x="6949440" y="2295144"/>
+            <a:ext cx="4297680" cy="365760"/>
+          </a:xfrm>
+          <a:prstGeom prst="rect">
+            <a:avLst/>
+          </a:prstGeom>
+          <a:noFill/>
+          <a:ln/>
+        </p:spPr>
+        <p:txBody>
+          <a:bodyPr wrap="square" rtlCol="0" anchor="ctr"/>
+          <a:lstStyle/>
+          <a:p>
+            <a:pPr indent="0" marL="0">
+              <a:buNone/>
+            </a:pPr>
+            <a:r>
+              <a:rPr lang="en-US" sz="1500" b="1" dirty="0">
+                <a:solidFill>
+                  <a:srgbClr val="FFFFFF"/>
+                </a:solidFill>
+                <a:latin typeface="Calibri" pitchFamily="34" charset="0"/>
+                <a:ea typeface="Calibri" pitchFamily="34" charset="-122"/>
+                <a:cs typeface="Calibri" pitchFamily="34" charset="-120"/>
+              </a:rPr>
+              <a:t>Archived with a fingerprint</a:t>
+            </a:r>
+            <a:endParaRPr lang="en-US" sz="1500" dirty="0"/>
+          </a:p>
+        </p:txBody>
+      </p:sp>
+      <p:sp>
+        <p:nvSpPr>
+          <p:cNvPr id="12" name="Text 10"/>
+          <p:cNvSpPr/>
+          <p:nvPr/>
+        </p:nvSpPr>
+        <p:spPr>
+          <a:xfrm>
+            <a:off x="6949440" y="2651760"/>
+            <a:ext cx="4343400" cy="566928"/>
+          </a:xfrm>
+          <a:prstGeom prst="rect">
+            <a:avLst/>
+          </a:prstGeom>
+          <a:noFill/>
+          <a:ln/>
+        </p:spPr>
+        <p:txBody>
+          <a:bodyPr wrap="square" rtlCol="0" anchor="ctr"/>
+          <a:lstStyle/>
+          <a:p>
+            <a:pPr indent="0" marL="0">
+              <a:buNone/>
+            </a:pPr>
+            <a:r>
+              <a:rPr lang="en-US" sz="1150" dirty="0">
+                <a:solidFill>
+                  <a:srgbClr val="CADCFC"/>
+                </a:solidFill>
+                <a:latin typeface="Calibri" pitchFamily="34" charset="0"/>
+                <a:ea typeface="Calibri" pitchFamily="34" charset="-122"/>
+                <a:cs typeface="Calibri" pitchFamily="34" charset="-120"/>
+              </a:rPr>
+              <a:t>Every figure is pinned to a dated snapshot and a SHA-256 checksum.</a:t>
+            </a:r>
+            <a:endParaRPr lang="en-US" sz="1150" dirty="0"/>
+          </a:p>
+        </p:txBody>
+      </p:sp>
+      <p:sp>
+        <p:nvSpPr>
+          <p:cNvPr id="13" name="Shape 11"/>
+          <p:cNvSpPr/>
+          <p:nvPr/>
+        </p:nvSpPr>
+        <p:spPr>
+          <a:xfrm>
+            <a:off x="640080" y="3474720"/>
+            <a:ext cx="5257800" cy="1143000"/>
+          </a:xfrm>
+          <a:prstGeom prst="roundRect">
+            <a:avLst>
+              <a:gd name="adj" fmla="val 4800"/>
+            </a:avLst>
+          </a:prstGeom>
+          <a:solidFill>
+            <a:srgbClr val="15315A"/>
+          </a:solidFill>
+          <a:ln w="12700">
+            <a:solidFill>
+              <a:srgbClr val="24487A"/>
+            </a:solidFill>
+            <a:prstDash val="solid"/>
+          </a:ln>
+        </p:spPr>
+      </p:sp>
+      <p:sp>
+        <p:nvSpPr>
+          <p:cNvPr id="14" name="Text 12"/>
+          <p:cNvSpPr/>
+          <p:nvPr/>
+        </p:nvSpPr>
+        <p:spPr>
+          <a:xfrm>
+            <a:off x="822960" y="3639312"/>
+            <a:ext cx="502920" cy="502920"/>
+          </a:xfrm>
+          <a:prstGeom prst="rect">
+            <a:avLst/>
+          </a:prstGeom>
+          <a:noFill/>
+          <a:ln/>
+        </p:spPr>
+        <p:txBody>
+          <a:bodyPr wrap="square" rtlCol="0" anchor="ctr"/>
+          <a:lstStyle/>
+          <a:p>
+            <a:pPr algn="ctr" indent="0" marL="0">
+              <a:buNone/>
+            </a:pPr>
+            <a:r>
+              <a:rPr lang="en-US" sz="2200" b="1" dirty="0">
+                <a:solidFill>
+                  <a:srgbClr val="6FE3B8"/>
+                </a:solidFill>
+                <a:latin typeface="Georgia" pitchFamily="34" charset="0"/>
+                <a:ea typeface="Georgia" pitchFamily="34" charset="-122"/>
+                <a:cs typeface="Georgia" pitchFamily="34" charset="-120"/>
+              </a:rPr>
+              <a:t>✓</a:t>
+            </a:r>
+            <a:endParaRPr lang="en-US" sz="2200" dirty="0"/>
+          </a:p>
+        </p:txBody>
+      </p:sp>
+      <p:sp>
+        <p:nvSpPr>
+          <p:cNvPr id="15" name="Text 13"/>
+          <p:cNvSpPr/>
+          <p:nvPr/>
+        </p:nvSpPr>
+        <p:spPr>
+          <a:xfrm>
+            <a:off x="1417320" y="3621024"/>
+            <a:ext cx="4297680" cy="365760"/>
+          </a:xfrm>
+          <a:prstGeom prst="rect">
+            <a:avLst/>
+          </a:prstGeom>
+          <a:noFill/>
+          <a:ln/>
+        </p:spPr>
+        <p:txBody>
+          <a:bodyPr wrap="square" rtlCol="0" anchor="ctr"/>
+          <a:lstStyle/>
+          <a:p>
+            <a:pPr indent="0" marL="0">
+              <a:buNone/>
+            </a:pPr>
+            <a:r>
+              <a:rPr lang="en-US" sz="1500" b="1" dirty="0">
+                <a:solidFill>
+                  <a:srgbClr val="FFFFFF"/>
+                </a:solidFill>
+                <a:latin typeface="Calibri" pitchFamily="34" charset="0"/>
+                <a:ea typeface="Calibri" pitchFamily="34" charset="-122"/>
+                <a:cs typeface="Calibri" pitchFamily="34" charset="-120"/>
+              </a:rPr>
+              <a:t>Reconciled, not merged</a:t>
+            </a:r>
+            <a:endParaRPr lang="en-US" sz="1500" dirty="0"/>
+          </a:p>
+        </p:txBody>
+      </p:sp>
+      <p:sp>
+        <p:nvSpPr>
+          <p:cNvPr id="16" name="Text 14"/>
+          <p:cNvSpPr/>
+          <p:nvPr/>
+        </p:nvSpPr>
+        <p:spPr>
+          <a:xfrm>
+            <a:off x="1417320" y="3977640"/>
+            <a:ext cx="4343400" cy="566928"/>
+          </a:xfrm>
+          <a:prstGeom prst="rect">
+            <a:avLst/>
+          </a:prstGeom>
+          <a:noFill/>
+          <a:ln/>
+        </p:spPr>
+        <p:txBody>
+          <a:bodyPr wrap="square" rtlCol="0" anchor="ctr"/>
+          <a:lstStyle/>
+          <a:p>
+            <a:pPr indent="0" marL="0">
+              <a:buNone/>
+            </a:pPr>
+            <a:r>
+              <a:rPr lang="en-US" sz="1150" dirty="0">
+                <a:solidFill>
+                  <a:srgbClr val="CADCFC"/>
+                </a:solidFill>
+                <a:latin typeface="Calibri" pitchFamily="34" charset="0"/>
+                <a:ea typeface="Calibri" pitchFamily="34" charset="-122"/>
+                <a:cs typeface="Calibri" pitchFamily="34" charset="-120"/>
+              </a:rPr>
+              <a:t>The two ledgers are squared against each other; every mismatch is logged with its cause.</a:t>
+            </a:r>
+            <a:endParaRPr lang="en-US" sz="1150" dirty="0"/>
+          </a:p>
+        </p:txBody>
+      </p:sp>
+      <p:sp>
+        <p:nvSpPr>
+          <p:cNvPr id="17" name="Shape 15"/>
+          <p:cNvSpPr/>
+          <p:nvPr/>
+        </p:nvSpPr>
+        <p:spPr>
+          <a:xfrm>
+            <a:off x="6172200" y="3474720"/>
+            <a:ext cx="5257800" cy="1143000"/>
+          </a:xfrm>
+          <a:prstGeom prst="roundRect">
+            <a:avLst>
+              <a:gd name="adj" fmla="val 4800"/>
+            </a:avLst>
+          </a:prstGeom>
+          <a:solidFill>
+            <a:srgbClr val="15315A"/>
+          </a:solidFill>
+          <a:ln w="12700">
+            <a:solidFill>
+              <a:srgbClr val="24487A"/>
+            </a:solidFill>
+            <a:prstDash val="solid"/>
+          </a:ln>
+        </p:spPr>
+      </p:sp>
+      <p:sp>
+        <p:nvSpPr>
+          <p:cNvPr id="18" name="Text 16"/>
+          <p:cNvSpPr/>
+          <p:nvPr/>
+        </p:nvSpPr>
+        <p:spPr>
+          <a:xfrm>
+            <a:off x="6355080" y="3639312"/>
+            <a:ext cx="502920" cy="502920"/>
+          </a:xfrm>
+          <a:prstGeom prst="rect">
+            <a:avLst/>
+          </a:prstGeom>
+          <a:noFill/>
+          <a:ln/>
+        </p:spPr>
+        <p:txBody>
+          <a:bodyPr wrap="square" rtlCol="0" anchor="ctr"/>
+          <a:lstStyle/>
+          <a:p>
+            <a:pPr algn="ctr" indent="0" marL="0">
+              <a:buNone/>
+            </a:pPr>
+            <a:r>
+              <a:rPr lang="en-US" sz="2200" b="1" dirty="0">
+                <a:solidFill>
+                  <a:srgbClr val="6FE3B8"/>
+                </a:solidFill>
+                <a:latin typeface="Georgia" pitchFamily="34" charset="0"/>
+                <a:ea typeface="Georgia" pitchFamily="34" charset="-122"/>
+                <a:cs typeface="Georgia" pitchFamily="34" charset="-120"/>
+              </a:rPr>
+              <a:t>✓</a:t>
+            </a:r>
+            <a:endParaRPr lang="en-US" sz="2200" dirty="0"/>
+          </a:p>
+        </p:txBody>
+      </p:sp>
+      <p:sp>
+        <p:nvSpPr>
+          <p:cNvPr id="19" name="Text 17"/>
+          <p:cNvSpPr/>
+          <p:nvPr/>
+        </p:nvSpPr>
+        <p:spPr>
+          <a:xfrm>
+            <a:off x="6949440" y="3621024"/>
+            <a:ext cx="4297680" cy="365760"/>
+          </a:xfrm>
+          <a:prstGeom prst="rect">
+            <a:avLst/>
+          </a:prstGeom>
+          <a:noFill/>
+          <a:ln/>
+        </p:spPr>
+        <p:txBody>
+          <a:bodyPr wrap="square" rtlCol="0" anchor="ctr"/>
+          <a:lstStyle/>
+          <a:p>
+            <a:pPr indent="0" marL="0">
+              <a:buNone/>
+            </a:pPr>
+            <a:r>
+              <a:rPr lang="en-US" sz="1500" b="1" dirty="0">
+                <a:solidFill>
+                  <a:srgbClr val="FFFFFF"/>
+                </a:solidFill>
+                <a:latin typeface="Calibri" pitchFamily="34" charset="0"/>
+                <a:ea typeface="Calibri" pitchFamily="34" charset="-122"/>
+                <a:cs typeface="Calibri" pitchFamily="34" charset="-120"/>
+              </a:rPr>
+              <a:t>Never fabricated</a:t>
+            </a:r>
+            <a:endParaRPr lang="en-US" sz="1500" dirty="0"/>
+          </a:p>
+        </p:txBody>
+      </p:sp>
+      <p:sp>
+        <p:nvSpPr>
+          <p:cNvPr id="20" name="Text 18"/>
+          <p:cNvSpPr/>
+          <p:nvPr/>
+        </p:nvSpPr>
+        <p:spPr>
+          <a:xfrm>
+            <a:off x="6949440" y="3977640"/>
+            <a:ext cx="4343400" cy="566928"/>
+          </a:xfrm>
+          <a:prstGeom prst="rect">
+            <a:avLst/>
+          </a:prstGeom>
+          <a:noFill/>
+          <a:ln/>
+        </p:spPr>
+        <p:txBody>
+          <a:bodyPr wrap="square" rtlCol="0" anchor="ctr"/>
+          <a:lstStyle/>
+          <a:p>
+            <a:pPr indent="0" marL="0">
+              <a:buNone/>
+            </a:pPr>
+            <a:r>
+              <a:rPr lang="en-US" sz="1150" dirty="0">
+                <a:solidFill>
+                  <a:srgbClr val="CADCFC"/>
+                </a:solidFill>
+                <a:latin typeface="Calibri" pitchFamily="34" charset="0"/>
+                <a:ea typeface="Calibri" pitchFamily="34" charset="-122"/>
+                <a:cs typeface="Calibri" pitchFamily="34" charset="-120"/>
+              </a:rPr>
+              <a:t>What cannot be verified is left blank and labelled missing.</a:t>
+            </a:r>
+            <a:endParaRPr lang="en-US" sz="1150" dirty="0"/>
+          </a:p>
+        </p:txBody>
+      </p:sp>
+      <p:sp>
+        <p:nvSpPr>
+          <p:cNvPr id="21" name="Shape 19"/>
+          <p:cNvSpPr/>
+          <p:nvPr/>
+        </p:nvSpPr>
+        <p:spPr>
+          <a:xfrm>
+            <a:off x="640080" y="4800600"/>
+            <a:ext cx="5257800" cy="1143000"/>
+          </a:xfrm>
+          <a:prstGeom prst="roundRect">
+            <a:avLst>
+              <a:gd name="adj" fmla="val 4800"/>
+            </a:avLst>
+          </a:prstGeom>
+          <a:solidFill>
+            <a:srgbClr val="15315A"/>
+          </a:solidFill>
+          <a:ln w="12700">
+            <a:solidFill>
+              <a:srgbClr val="24487A"/>
+            </a:solidFill>
+            <a:prstDash val="solid"/>
+          </a:ln>
+        </p:spPr>
+      </p:sp>
+      <p:sp>
+        <p:nvSpPr>
+          <p:cNvPr id="22" name="Text 20"/>
+          <p:cNvSpPr/>
+          <p:nvPr/>
+        </p:nvSpPr>
+        <p:spPr>
+          <a:xfrm>
+            <a:off x="822960" y="4965192"/>
+            <a:ext cx="502920" cy="502920"/>
+          </a:xfrm>
+          <a:prstGeom prst="rect">
+            <a:avLst/>
+          </a:prstGeom>
+          <a:noFill/>
+          <a:ln/>
+        </p:spPr>
+        <p:txBody>
+          <a:bodyPr wrap="square" rtlCol="0" anchor="ctr"/>
+          <a:lstStyle/>
+          <a:p>
+            <a:pPr algn="ctr" indent="0" marL="0">
+              <a:buNone/>
+            </a:pPr>
+            <a:r>
+              <a:rPr lang="en-US" sz="2200" b="1" dirty="0">
+                <a:solidFill>
+                  <a:srgbClr val="6FE3B8"/>
+                </a:solidFill>
+                <a:latin typeface="Georgia" pitchFamily="34" charset="0"/>
+                <a:ea typeface="Georgia" pitchFamily="34" charset="-122"/>
+                <a:cs typeface="Georgia" pitchFamily="34" charset="-120"/>
+              </a:rPr>
+              <a:t>✓</a:t>
+            </a:r>
+            <a:endParaRPr lang="en-US" sz="2200" dirty="0"/>
+          </a:p>
+        </p:txBody>
+      </p:sp>
+      <p:sp>
+        <p:nvSpPr>
+          <p:cNvPr id="23" name="Text 21"/>
+          <p:cNvSpPr/>
+          <p:nvPr/>
+        </p:nvSpPr>
+        <p:spPr>
+          <a:xfrm>
+            <a:off x="1417320" y="4946904"/>
+            <a:ext cx="4297680" cy="365760"/>
+          </a:xfrm>
+          <a:prstGeom prst="rect">
+            <a:avLst/>
+          </a:prstGeom>
+          <a:noFill/>
+          <a:ln/>
+        </p:spPr>
+        <p:txBody>
+          <a:bodyPr wrap="square" rtlCol="0" anchor="ctr"/>
+          <a:lstStyle/>
+          <a:p>
+            <a:pPr indent="0" marL="0">
+              <a:buNone/>
+            </a:pPr>
+            <a:r>
+              <a:rPr lang="en-US" sz="1500" b="1" dirty="0">
+                <a:solidFill>
+                  <a:srgbClr val="FFFFFF"/>
+                </a:solidFill>
+                <a:latin typeface="Calibri" pitchFamily="34" charset="0"/>
+                <a:ea typeface="Calibri" pitchFamily="34" charset="-122"/>
+                <a:cs typeface="Calibri" pitchFamily="34" charset="-120"/>
+              </a:rPr>
+              <a:t>Honest about limits</a:t>
+            </a:r>
+            <a:endParaRPr lang="en-US" sz="1500" dirty="0"/>
+          </a:p>
+        </p:txBody>
+      </p:sp>
+      <p:sp>
+        <p:nvSpPr>
+          <p:cNvPr id="24" name="Text 22"/>
+          <p:cNvSpPr/>
+          <p:nvPr/>
+        </p:nvSpPr>
+        <p:spPr>
+          <a:xfrm>
+            <a:off x="1417320" y="5303520"/>
+            <a:ext cx="4343400" cy="566928"/>
+          </a:xfrm>
+          <a:prstGeom prst="rect">
+            <a:avLst/>
+          </a:prstGeom>
+          <a:noFill/>
+          <a:ln/>
+        </p:spPr>
+        <p:txBody>
+          <a:bodyPr wrap="square" rtlCol="0" anchor="ctr"/>
+          <a:lstStyle/>
+          <a:p>
+            <a:pPr indent="0" marL="0">
+              <a:buNone/>
+            </a:pPr>
+            <a:r>
+              <a:rPr lang="en-US" sz="1150" dirty="0">
+                <a:solidFill>
+                  <a:srgbClr val="CADCFC"/>
+                </a:solidFill>
+                <a:latin typeface="Calibri" pitchFamily="34" charset="0"/>
+                <a:ea typeface="Calibri" pitchFamily="34" charset="-122"/>
+                <a:cs typeface="Calibri" pitchFamily="34" charset="-120"/>
+              </a:rPr>
+              <a:t>Redactions, classifications and uncertainty are flagged on every chart.</a:t>
+            </a:r>
+            <a:endParaRPr lang="en-US" sz="1150" dirty="0"/>
+          </a:p>
+        </p:txBody>
+      </p:sp>
+      <p:sp>
+        <p:nvSpPr>
+          <p:cNvPr id="25" name="Shape 23"/>
+          <p:cNvSpPr/>
+          <p:nvPr/>
+        </p:nvSpPr>
+        <p:spPr>
+          <a:xfrm>
+            <a:off x="6172200" y="4800600"/>
+            <a:ext cx="5257800" cy="1143000"/>
+          </a:xfrm>
+          <a:prstGeom prst="roundRect">
+            <a:avLst>
+              <a:gd name="adj" fmla="val 4800"/>
+            </a:avLst>
+          </a:prstGeom>
+          <a:solidFill>
+            <a:srgbClr val="15315A"/>
+          </a:solidFill>
+          <a:ln w="12700">
+            <a:solidFill>
+              <a:srgbClr val="24487A"/>
+            </a:solidFill>
+            <a:prstDash val="solid"/>
+          </a:ln>
+        </p:spPr>
+      </p:sp>
+      <p:sp>
+        <p:nvSpPr>
+          <p:cNvPr id="26" name="Text 24"/>
+          <p:cNvSpPr/>
+          <p:nvPr/>
+        </p:nvSpPr>
+        <p:spPr>
+          <a:xfrm>
+            <a:off x="6355080" y="4965192"/>
+            <a:ext cx="502920" cy="502920"/>
+          </a:xfrm>
+          <a:prstGeom prst="rect">
+            <a:avLst/>
+          </a:prstGeom>
+          <a:noFill/>
+          <a:ln/>
+        </p:spPr>
+        <p:txBody>
+          <a:bodyPr wrap="square" rtlCol="0" anchor="ctr"/>
+          <a:lstStyle/>
+          <a:p>
+            <a:pPr algn="ctr" indent="0" marL="0">
+              <a:buNone/>
+            </a:pPr>
+            <a:r>
+              <a:rPr lang="en-US" sz="2200" b="1" dirty="0">
+                <a:solidFill>
+                  <a:srgbClr val="6FE3B8"/>
+                </a:solidFill>
+                <a:latin typeface="Georgia" pitchFamily="34" charset="0"/>
+                <a:ea typeface="Georgia" pitchFamily="34" charset="-122"/>
+                <a:cs typeface="Georgia" pitchFamily="34" charset="-120"/>
+              </a:rPr>
+              <a:t>✓</a:t>
+            </a:r>
+            <a:endParaRPr lang="en-US" sz="2200" dirty="0"/>
+          </a:p>
+        </p:txBody>
+      </p:sp>
+      <p:sp>
+        <p:nvSpPr>
+          <p:cNvPr id="27" name="Text 25"/>
+          <p:cNvSpPr/>
+          <p:nvPr/>
+        </p:nvSpPr>
+        <p:spPr>
+          <a:xfrm>
+            <a:off x="6949440" y="4946904"/>
+            <a:ext cx="4297680" cy="365760"/>
+          </a:xfrm>
+          <a:prstGeom prst="rect">
+            <a:avLst/>
+          </a:prstGeom>
+          <a:noFill/>
+          <a:ln/>
+        </p:spPr>
+        <p:txBody>
+          <a:bodyPr wrap="square" rtlCol="0" anchor="ctr"/>
+          <a:lstStyle/>
+          <a:p>
+            <a:pPr indent="0" marL="0">
+              <a:buNone/>
+            </a:pPr>
+            <a:r>
+              <a:rPr lang="en-US" sz="1500" b="1" dirty="0">
+                <a:solidFill>
+                  <a:srgbClr val="FFFFFF"/>
+                </a:solidFill>
+                <a:latin typeface="Calibri" pitchFamily="34" charset="0"/>
+                <a:ea typeface="Calibri" pitchFamily="34" charset="-122"/>
+                <a:cs typeface="Calibri" pitchFamily="34" charset="-120"/>
+              </a:rPr>
+              <a:t>Fully reproducible</a:t>
+            </a:r>
+            <a:endParaRPr lang="en-US" sz="1500" dirty="0"/>
+          </a:p>
+        </p:txBody>
+      </p:sp>
+      <p:sp>
+        <p:nvSpPr>
+          <p:cNvPr id="28" name="Text 26"/>
+          <p:cNvSpPr/>
+          <p:nvPr/>
+        </p:nvSpPr>
+        <p:spPr>
+          <a:xfrm>
+            <a:off x="6949440" y="5303520"/>
+            <a:ext cx="4343400" cy="566928"/>
+          </a:xfrm>
+          <a:prstGeom prst="rect">
+            <a:avLst/>
+          </a:prstGeom>
+          <a:noFill/>
+          <a:ln/>
+        </p:spPr>
+        <p:txBody>
+          <a:bodyPr wrap="square" rtlCol="0" anchor="ctr"/>
+          <a:lstStyle/>
+          <a:p>
+            <a:pPr indent="0" marL="0">
+              <a:buNone/>
+            </a:pPr>
+            <a:r>
+              <a:rPr lang="en-US" sz="1150" dirty="0">
+                <a:solidFill>
+                  <a:srgbClr val="CADCFC"/>
+                </a:solidFill>
+                <a:latin typeface="Calibri" pitchFamily="34" charset="0"/>
+                <a:ea typeface="Calibri" pitchFamily="34" charset="-122"/>
+                <a:cs typeface="Calibri" pitchFamily="34" charset="-120"/>
+              </a:rPr>
+              <a:t>Anyone can re-run the pipeline and get the same numbers.</a:t>
+            </a:r>
+            <a:endParaRPr lang="en-US" sz="1150" dirty="0"/>
+          </a:p>
+        </p:txBody>
+      </p:sp>
+      <p:sp>
+        <p:nvSpPr>
+          <p:cNvPr id="29" name="Text 27"/>
+          <p:cNvSpPr/>
+          <p:nvPr/>
+        </p:nvSpPr>
+        <p:spPr>
+          <a:xfrm>
+            <a:off x="640080" y="6355080"/>
+            <a:ext cx="10058400" cy="274320"/>
+          </a:xfrm>
+          <a:prstGeom prst="rect">
+            <a:avLst/>
+          </a:prstGeom>
+          <a:noFill/>
+          <a:ln/>
+        </p:spPr>
+        <p:txBody>
+          <a:bodyPr wrap="square" rtlCol="0" anchor="ctr"/>
+          <a:lstStyle/>
+          <a:p>
+            <a:pPr indent="0" marL="0">
+              <a:buNone/>
+            </a:pPr>
+            <a:r>
+              <a:rPr lang="en-US" sz="1100" i="1" dirty="0">
+                <a:solidFill>
+                  <a:srgbClr val="8FA6C4"/>
+                </a:solidFill>
+                <a:latin typeface="Calibri" pitchFamily="34" charset="0"/>
+                <a:ea typeface="Calibri" pitchFamily="34" charset="-122"/>
+                <a:cs typeface="Calibri" pitchFamily="34" charset="-120"/>
+              </a:rPr>
+              <a:t>9 sources · all reconciling to the dollar where they overlap</a:t>
+            </a:r>
+            <a:endParaRPr lang="en-US" sz="1100" dirty="0"/>
           </a:p>
         </p:txBody>
       </p:sp>
